--- a/a7/build/out/u4/A7 4.04  Slides.pptx
+++ b/a7/build/out/u4/A7 4.04  Slides.pptx
@@ -11751,7 +11751,7 @@
                 </a:solidFill>
                 <a:latin typeface="Century Schoolbook"/>
               </a:rPr>
-              <a:t>Which is the area, written correctly?</a:t>
+              <a:t>Which is the area, to the correct significant digits?</a:t>
             </a:r>
           </a:p>
         </p:txBody>
@@ -12521,7 +12521,7 @@
                 </a:solidFill>
                 <a:latin typeface="Century Schoolbook"/>
               </a:rPr>
-              <a:t>Which is the area, written correctly?</a:t>
+              <a:t>Which is the area, to the correct significant digits?</a:t>
             </a:r>
           </a:p>
         </p:txBody>

--- a/a7/build/out/u4/A7 4.04  Slides.pptx
+++ b/a7/build/out/u4/A7 4.04  Slides.pptx
@@ -3823,8 +3823,8 @@
         </p:nvSpPr>
         <p:spPr>
           <a:xfrm>
-            <a:off x="1485899" y="2186940"/>
-            <a:ext cx="3300984" cy="457200"/>
+            <a:off x="1727171" y="2185415"/>
+            <a:ext cx="3101434" cy="457200"/>
           </a:xfrm>
           <a:prstGeom prst="rect">
             <a:avLst/>
@@ -3833,7 +3833,7 @@
         </p:spPr>
         <p:txBody>
           <a:bodyPr wrap="none" lIns="45720" rIns="45720" tIns="18288" bIns="18288" anchor="ctr">
-            <a:spAutoFit/>
+            <a:noAutofit/>
           </a:bodyPr>
           <a:lstStyle/>
           <a:p>
@@ -3852,7 +3852,7 @@
       </p:sp>
       <p:pic>
         <p:nvPicPr>
-          <p:cNvPr id="10" name="Picture 9" descr="d18dbc9ddd0d98f4.png"/>
+          <p:cNvPr id="10" name="Picture 9" descr="2ea2d2cafb18840a.png"/>
           <p:cNvPicPr>
             <a:picLocks noChangeAspect="1"/>
           </p:cNvPicPr>
@@ -3866,8 +3866,8 @@
         </p:blipFill>
         <p:spPr>
           <a:xfrm>
-            <a:off x="4649723" y="2194560"/>
-            <a:ext cx="1786128" cy="441960"/>
+            <a:off x="4691445" y="2194560"/>
+            <a:ext cx="1789176" cy="438912"/>
           </a:xfrm>
           <a:prstGeom prst="rect">
             <a:avLst/>
@@ -3882,8 +3882,8 @@
         </p:nvSpPr>
         <p:spPr>
           <a:xfrm>
-            <a:off x="6435851" y="2186940"/>
-            <a:ext cx="1583944" cy="457200"/>
+            <a:off x="6480621" y="2185415"/>
+            <a:ext cx="1381716" cy="457200"/>
           </a:xfrm>
           <a:prstGeom prst="rect">
             <a:avLst/>
@@ -3892,7 +3892,7 @@
         </p:spPr>
         <p:txBody>
           <a:bodyPr wrap="none" lIns="45720" rIns="45720" tIns="18288" bIns="18288" anchor="ctr">
-            <a:spAutoFit/>
+            <a:noAutofit/>
           </a:bodyPr>
           <a:lstStyle/>
           <a:p>
@@ -3911,7 +3911,7 @@
       </p:sp>
       <p:pic>
         <p:nvPicPr>
-          <p:cNvPr id="12" name="Picture 11" descr="e2afadd128af9cbc.png"/>
+          <p:cNvPr id="12" name="Picture 11" descr="798bb70a13d738fd.png"/>
           <p:cNvPicPr>
             <a:picLocks noChangeAspect="1"/>
           </p:cNvPicPr>
@@ -3925,8 +3925,8 @@
         </p:blipFill>
         <p:spPr>
           <a:xfrm>
-            <a:off x="7882635" y="2194560"/>
-            <a:ext cx="2033015" cy="441960"/>
+            <a:off x="7725177" y="2194560"/>
+            <a:ext cx="2033015" cy="438912"/>
           </a:xfrm>
           <a:prstGeom prst="rect">
             <a:avLst/>
@@ -3941,8 +3941,8 @@
         </p:nvSpPr>
         <p:spPr>
           <a:xfrm>
-            <a:off x="9915651" y="2186940"/>
-            <a:ext cx="897128" cy="457200"/>
+            <a:off x="9758193" y="2185415"/>
+            <a:ext cx="813314" cy="457200"/>
           </a:xfrm>
           <a:prstGeom prst="rect">
             <a:avLst/>
@@ -3951,7 +3951,7 @@
         </p:spPr>
         <p:txBody>
           <a:bodyPr wrap="none" lIns="45720" rIns="45720" tIns="18288" bIns="18288" anchor="ctr">
-            <a:spAutoFit/>
+            <a:noAutofit/>
           </a:bodyPr>
           <a:lstStyle/>
           <a:p>
@@ -3976,7 +3976,7 @@
         </p:nvSpPr>
         <p:spPr>
           <a:xfrm>
-            <a:off x="777240" y="2956560"/>
+            <a:off x="777240" y="2953512"/>
             <a:ext cx="10607040" cy="429370"/>
           </a:xfrm>
           <a:prstGeom prst="rect">
@@ -4011,7 +4011,7 @@
         </p:nvSpPr>
         <p:spPr>
           <a:xfrm>
-            <a:off x="777240" y="3495658"/>
+            <a:off x="777240" y="3492610"/>
             <a:ext cx="10607040" cy="429370"/>
           </a:xfrm>
           <a:prstGeom prst="rect">
@@ -4362,8 +4362,8 @@
         </p:nvSpPr>
         <p:spPr>
           <a:xfrm>
-            <a:off x="1499616" y="2080260"/>
-            <a:ext cx="3472688" cy="457200"/>
+            <a:off x="1973513" y="2080260"/>
+            <a:ext cx="3245624" cy="457200"/>
           </a:xfrm>
           <a:prstGeom prst="rect">
             <a:avLst/>
@@ -4372,7 +4372,7 @@
         </p:spPr>
         <p:txBody>
           <a:bodyPr wrap="none" lIns="45720" rIns="45720" tIns="18288" bIns="18288" anchor="ctr">
-            <a:spAutoFit/>
+            <a:noAutofit/>
           </a:bodyPr>
           <a:lstStyle/>
           <a:p>
@@ -4405,7 +4405,7 @@
         </p:blipFill>
         <p:spPr>
           <a:xfrm>
-            <a:off x="4835144" y="2133599"/>
+            <a:off x="5081977" y="2133599"/>
             <a:ext cx="1804416" cy="350520"/>
           </a:xfrm>
           <a:prstGeom prst="rect">
@@ -4421,8 +4421,8 @@
         </p:nvSpPr>
         <p:spPr>
           <a:xfrm>
-            <a:off x="6639560" y="2080260"/>
-            <a:ext cx="4159504" cy="457200"/>
+            <a:off x="6886393" y="2080260"/>
+            <a:ext cx="3438773" cy="457200"/>
           </a:xfrm>
           <a:prstGeom prst="rect">
             <a:avLst/>
@@ -4431,7 +4431,7 @@
         </p:spPr>
         <p:txBody>
           <a:bodyPr wrap="none" lIns="45720" rIns="45720" tIns="18288" bIns="18288" anchor="ctr">
-            <a:spAutoFit/>
+            <a:noAutofit/>
           </a:bodyPr>
           <a:lstStyle/>
           <a:p>
@@ -4464,7 +4464,7 @@
         </p:blipFill>
         <p:spPr>
           <a:xfrm>
-            <a:off x="2979420" y="2863596"/>
+            <a:off x="3217029" y="2863596"/>
             <a:ext cx="2008632" cy="353568"/>
           </a:xfrm>
           <a:prstGeom prst="rect">
@@ -4480,8 +4480,8 @@
         </p:nvSpPr>
         <p:spPr>
           <a:xfrm>
-            <a:off x="4988052" y="2811780"/>
-            <a:ext cx="4331208" cy="457200"/>
+            <a:off x="5225661" y="2811780"/>
+            <a:ext cx="3855989" cy="457200"/>
           </a:xfrm>
           <a:prstGeom prst="rect">
             <a:avLst/>
@@ -4490,7 +4490,7 @@
         </p:spPr>
         <p:txBody>
           <a:bodyPr wrap="none" lIns="45720" rIns="45720" tIns="18288" bIns="18288" anchor="ctr">
-            <a:spAutoFit/>
+            <a:noAutofit/>
           </a:bodyPr>
           <a:lstStyle/>
           <a:p>
@@ -4807,7 +4807,7 @@
       </p:sp>
       <p:pic>
         <p:nvPicPr>
-          <p:cNvPr id="9" name="Picture 8" descr="020e59f43e04ad25.png"/>
+          <p:cNvPr id="9" name="Picture 8" descr="799fbcd94df55113.png"/>
           <p:cNvPicPr>
             <a:picLocks noChangeAspect="1"/>
           </p:cNvPicPr>
@@ -4822,7 +4822,7 @@
         <p:spPr>
           <a:xfrm>
             <a:off x="1828800" y="1920240"/>
-            <a:ext cx="5943600" cy="289560"/>
+            <a:ext cx="5946648" cy="289560"/>
           </a:xfrm>
           <a:prstGeom prst="rect">
             <a:avLst/>
@@ -4837,8 +4837,8 @@
         </p:nvSpPr>
         <p:spPr>
           <a:xfrm>
-            <a:off x="8229600" y="1836420"/>
-            <a:ext cx="3154679" cy="502920"/>
+            <a:off x="8232648" y="1836420"/>
+            <a:ext cx="3151631" cy="502920"/>
           </a:xfrm>
           <a:prstGeom prst="rect">
             <a:avLst/>
@@ -4866,7 +4866,7 @@
       </p:sp>
       <p:pic>
         <p:nvPicPr>
-          <p:cNvPr id="11" name="Picture 10" descr="8d5532fbedc87e94.png"/>
+          <p:cNvPr id="11" name="Picture 10" descr="22b44a67be12e9b0.png"/>
           <p:cNvPicPr>
             <a:picLocks noChangeAspect="1"/>
           </p:cNvPicPr>
@@ -4881,7 +4881,7 @@
         <p:spPr>
           <a:xfrm>
             <a:off x="1828800" y="2484120"/>
-            <a:ext cx="3861816" cy="429768"/>
+            <a:ext cx="3867912" cy="429768"/>
           </a:xfrm>
           <a:prstGeom prst="rect">
             <a:avLst/>
@@ -4896,8 +4896,8 @@
         </p:nvSpPr>
         <p:spPr>
           <a:xfrm>
-            <a:off x="6147816" y="2470404"/>
-            <a:ext cx="5236463" cy="502920"/>
+            <a:off x="6153912" y="2470404"/>
+            <a:ext cx="5230367" cy="502920"/>
           </a:xfrm>
           <a:prstGeom prst="rect">
             <a:avLst/>
@@ -4925,7 +4925,7 @@
       </p:sp>
       <p:pic>
         <p:nvPicPr>
-          <p:cNvPr id="13" name="Picture 12" descr="510517ae70cd4194.png"/>
+          <p:cNvPr id="13" name="Picture 12" descr="4629515b15c2b4c2.png"/>
           <p:cNvPicPr>
             <a:picLocks noChangeAspect="1"/>
           </p:cNvPicPr>
@@ -4940,7 +4940,7 @@
         <p:spPr>
           <a:xfrm>
             <a:off x="1828800" y="3188207"/>
-            <a:ext cx="5952744" cy="350520"/>
+            <a:ext cx="5955792" cy="350520"/>
           </a:xfrm>
           <a:prstGeom prst="rect">
             <a:avLst/>
@@ -4955,8 +4955,8 @@
         </p:nvSpPr>
         <p:spPr>
           <a:xfrm>
-            <a:off x="8238744" y="3134868"/>
-            <a:ext cx="3145535" cy="502920"/>
+            <a:off x="8241792" y="3134868"/>
+            <a:ext cx="3142487" cy="502920"/>
           </a:xfrm>
           <a:prstGeom prst="rect">
             <a:avLst/>
@@ -5306,8 +5306,8 @@
         </p:nvSpPr>
         <p:spPr>
           <a:xfrm>
-            <a:off x="3284728" y="2183892"/>
-            <a:ext cx="2099056" cy="457200"/>
+            <a:off x="3488002" y="2183892"/>
+            <a:ext cx="1850467" cy="457200"/>
           </a:xfrm>
           <a:prstGeom prst="rect">
             <a:avLst/>
@@ -5316,7 +5316,7 @@
         </p:spPr>
         <p:txBody>
           <a:bodyPr wrap="none" lIns="45720" rIns="45720" tIns="18288" bIns="18288" anchor="ctr">
-            <a:spAutoFit/>
+            <a:noAutofit/>
           </a:bodyPr>
           <a:lstStyle/>
           <a:p>
@@ -5349,7 +5349,7 @@
         </p:blipFill>
         <p:spPr>
           <a:xfrm>
-            <a:off x="5246624" y="2194560"/>
+            <a:off x="5201310" y="2194560"/>
             <a:ext cx="2011680" cy="435864"/>
           </a:xfrm>
           <a:prstGeom prst="rect">
@@ -5365,8 +5365,8 @@
         </p:nvSpPr>
         <p:spPr>
           <a:xfrm>
-            <a:off x="7258304" y="2183892"/>
-            <a:ext cx="1755648" cy="457200"/>
+            <a:off x="7212990" y="2183892"/>
+            <a:ext cx="1597686" cy="457200"/>
           </a:xfrm>
           <a:prstGeom prst="rect">
             <a:avLst/>
@@ -5375,7 +5375,7 @@
         </p:spPr>
         <p:txBody>
           <a:bodyPr wrap="none" lIns="45720" rIns="45720" tIns="18288" bIns="18288" anchor="ctr">
-            <a:spAutoFit/>
+            <a:noAutofit/>
           </a:bodyPr>
           <a:lstStyle/>
           <a:p>
@@ -5400,8 +5400,8 @@
         </p:nvSpPr>
         <p:spPr>
           <a:xfrm>
-            <a:off x="2329688" y="2942844"/>
-            <a:ext cx="2099056" cy="457200"/>
+            <a:off x="2593365" y="2942844"/>
+            <a:ext cx="1882649" cy="457200"/>
           </a:xfrm>
           <a:prstGeom prst="rect">
             <a:avLst/>
@@ -5410,7 +5410,7 @@
         </p:spPr>
         <p:txBody>
           <a:bodyPr wrap="none" lIns="45720" rIns="45720" tIns="18288" bIns="18288" anchor="ctr">
-            <a:spAutoFit/>
+            <a:noAutofit/>
           </a:bodyPr>
           <a:lstStyle/>
           <a:p>
@@ -5443,7 +5443,7 @@
         </p:blipFill>
         <p:spPr>
           <a:xfrm>
-            <a:off x="4291584" y="2950464"/>
+            <a:off x="4338855" y="2950464"/>
             <a:ext cx="2033015" cy="441960"/>
           </a:xfrm>
           <a:prstGeom prst="rect">
@@ -5459,8 +5459,8 @@
         </p:nvSpPr>
         <p:spPr>
           <a:xfrm>
-            <a:off x="6324599" y="2942844"/>
-            <a:ext cx="3644392" cy="457200"/>
+            <a:off x="6371871" y="2942844"/>
+            <a:ext cx="3333443" cy="457200"/>
           </a:xfrm>
           <a:prstGeom prst="rect">
             <a:avLst/>
@@ -5469,7 +5469,7 @@
         </p:spPr>
         <p:txBody>
           <a:bodyPr wrap="none" lIns="45720" rIns="45720" tIns="18288" bIns="18288" anchor="ctr">
-            <a:spAutoFit/>
+            <a:noAutofit/>
           </a:bodyPr>
           <a:lstStyle/>
           <a:p>
@@ -5792,8 +5792,8 @@
         </p:nvSpPr>
         <p:spPr>
           <a:xfrm>
-            <a:off x="3284728" y="2183892"/>
-            <a:ext cx="2099056" cy="457200"/>
+            <a:off x="3488002" y="2183892"/>
+            <a:ext cx="1850467" cy="457200"/>
           </a:xfrm>
           <a:prstGeom prst="rect">
             <a:avLst/>
@@ -5802,7 +5802,7 @@
         </p:spPr>
         <p:txBody>
           <a:bodyPr wrap="none" lIns="45720" rIns="45720" tIns="18288" bIns="18288" anchor="ctr">
-            <a:spAutoFit/>
+            <a:noAutofit/>
           </a:bodyPr>
           <a:lstStyle/>
           <a:p>
@@ -5821,7 +5821,7 @@
       </p:sp>
       <p:pic>
         <p:nvPicPr>
-          <p:cNvPr id="10" name="Picture 9" descr="6fe96bec24508838.png"/>
+          <p:cNvPr id="10" name="Picture 9" descr="8579fbd842756a60.png"/>
           <p:cNvPicPr>
             <a:picLocks noChangeAspect="1"/>
           </p:cNvPicPr>
@@ -5835,7 +5835,7 @@
         </p:blipFill>
         <p:spPr>
           <a:xfrm>
-            <a:off x="5246624" y="2194560"/>
+            <a:off x="5201310" y="2194560"/>
             <a:ext cx="2011680" cy="435864"/>
           </a:xfrm>
           <a:prstGeom prst="rect">
@@ -5851,8 +5851,8 @@
         </p:nvSpPr>
         <p:spPr>
           <a:xfrm>
-            <a:off x="7258304" y="2183892"/>
-            <a:ext cx="1755648" cy="457200"/>
+            <a:off x="7212990" y="2183892"/>
+            <a:ext cx="1597686" cy="457200"/>
           </a:xfrm>
           <a:prstGeom prst="rect">
             <a:avLst/>
@@ -5861,7 +5861,7 @@
         </p:spPr>
         <p:txBody>
           <a:bodyPr wrap="none" lIns="45720" rIns="45720" tIns="18288" bIns="18288" anchor="ctr">
-            <a:spAutoFit/>
+            <a:noAutofit/>
           </a:bodyPr>
           <a:lstStyle/>
           <a:p>
@@ -5886,8 +5886,8 @@
         </p:nvSpPr>
         <p:spPr>
           <a:xfrm>
-            <a:off x="2329688" y="2942844"/>
-            <a:ext cx="2099056" cy="457200"/>
+            <a:off x="2593365" y="2941320"/>
+            <a:ext cx="1882649" cy="457200"/>
           </a:xfrm>
           <a:prstGeom prst="rect">
             <a:avLst/>
@@ -5896,7 +5896,7 @@
         </p:spPr>
         <p:txBody>
           <a:bodyPr wrap="none" lIns="45720" rIns="45720" tIns="18288" bIns="18288" anchor="ctr">
-            <a:spAutoFit/>
+            <a:noAutofit/>
           </a:bodyPr>
           <a:lstStyle/>
           <a:p>
@@ -5915,7 +5915,7 @@
       </p:sp>
       <p:pic>
         <p:nvPicPr>
-          <p:cNvPr id="13" name="Picture 12" descr="e7c28ca8c59a9fff.png"/>
+          <p:cNvPr id="13" name="Picture 12" descr="522cffef3ffba4df.png"/>
           <p:cNvPicPr>
             <a:picLocks noChangeAspect="1"/>
           </p:cNvPicPr>
@@ -5929,8 +5929,8 @@
         </p:blipFill>
         <p:spPr>
           <a:xfrm>
-            <a:off x="4291584" y="2950464"/>
-            <a:ext cx="2033015" cy="441960"/>
+            <a:off x="4338855" y="2950464"/>
+            <a:ext cx="2033015" cy="438912"/>
           </a:xfrm>
           <a:prstGeom prst="rect">
             <a:avLst/>
@@ -5945,8 +5945,8 @@
         </p:nvSpPr>
         <p:spPr>
           <a:xfrm>
-            <a:off x="6324599" y="2942844"/>
-            <a:ext cx="3644392" cy="457200"/>
+            <a:off x="6371871" y="2941320"/>
+            <a:ext cx="3333443" cy="457200"/>
           </a:xfrm>
           <a:prstGeom prst="rect">
             <a:avLst/>
@@ -5955,7 +5955,7 @@
         </p:spPr>
         <p:txBody>
           <a:bodyPr wrap="none" lIns="45720" rIns="45720" tIns="18288" bIns="18288" anchor="ctr">
-            <a:spAutoFit/>
+            <a:noAutofit/>
           </a:bodyPr>
           <a:lstStyle/>
           <a:p>
@@ -5980,7 +5980,7 @@
         </p:nvSpPr>
         <p:spPr>
           <a:xfrm>
-            <a:off x="777240" y="3712463"/>
+            <a:off x="777240" y="3709416"/>
             <a:ext cx="10607040" cy="429370"/>
           </a:xfrm>
           <a:prstGeom prst="rect">
@@ -6015,7 +6015,7 @@
         </p:nvSpPr>
         <p:spPr>
           <a:xfrm>
-            <a:off x="777240" y="4251562"/>
+            <a:off x="777240" y="4248514"/>
             <a:ext cx="10607040" cy="429370"/>
           </a:xfrm>
           <a:prstGeom prst="rect">
@@ -6050,7 +6050,7 @@
         </p:nvSpPr>
         <p:spPr>
           <a:xfrm>
-            <a:off x="777240" y="4973540"/>
+            <a:off x="777240" y="4970492"/>
             <a:ext cx="10607040" cy="548640"/>
           </a:xfrm>
           <a:prstGeom prst="rect">
@@ -7102,8 +7102,8 @@
         </p:nvSpPr>
         <p:spPr>
           <a:xfrm>
-            <a:off x="1231391" y="2171700"/>
-            <a:ext cx="4846320" cy="457200"/>
+            <a:off x="1448837" y="2171700"/>
+            <a:ext cx="4697470" cy="457200"/>
           </a:xfrm>
           <a:prstGeom prst="rect">
             <a:avLst/>
@@ -7112,7 +7112,7 @@
         </p:spPr>
         <p:txBody>
           <a:bodyPr wrap="none" lIns="45720" rIns="45720" tIns="18288" bIns="18288" anchor="ctr">
-            <a:spAutoFit/>
+            <a:noAutofit/>
           </a:bodyPr>
           <a:lstStyle/>
           <a:p>
@@ -7145,7 +7145,7 @@
         </p:blipFill>
         <p:spPr>
           <a:xfrm>
-            <a:off x="5940551" y="2226564"/>
+            <a:off x="6009147" y="2226564"/>
             <a:ext cx="1392936" cy="347472"/>
           </a:xfrm>
           <a:prstGeom prst="rect">
@@ -7161,8 +7161,8 @@
         </p:nvSpPr>
         <p:spPr>
           <a:xfrm>
-            <a:off x="7333488" y="2171700"/>
-            <a:ext cx="1583944" cy="457200"/>
+            <a:off x="7402083" y="2171700"/>
+            <a:ext cx="1381716" cy="457200"/>
           </a:xfrm>
           <a:prstGeom prst="rect">
             <a:avLst/>
@@ -7171,7 +7171,7 @@
         </p:spPr>
         <p:txBody>
           <a:bodyPr wrap="none" lIns="45720" rIns="45720" tIns="18288" bIns="18288" anchor="ctr">
-            <a:spAutoFit/>
+            <a:noAutofit/>
           </a:bodyPr>
           <a:lstStyle/>
           <a:p>
@@ -7204,7 +7204,7 @@
         </p:blipFill>
         <p:spPr>
           <a:xfrm>
-            <a:off x="8780272" y="2225040"/>
+            <a:off x="8646639" y="2225040"/>
             <a:ext cx="1389888" cy="350520"/>
           </a:xfrm>
           <a:prstGeom prst="rect">
@@ -7220,8 +7220,8 @@
         </p:nvSpPr>
         <p:spPr>
           <a:xfrm>
-            <a:off x="10170160" y="2171700"/>
-            <a:ext cx="897128" cy="457200"/>
+            <a:off x="10036527" y="2171700"/>
+            <a:ext cx="813314" cy="457200"/>
           </a:xfrm>
           <a:prstGeom prst="rect">
             <a:avLst/>
@@ -7230,7 +7230,7 @@
         </p:spPr>
         <p:txBody>
           <a:bodyPr wrap="none" lIns="45720" rIns="45720" tIns="18288" bIns="18288" anchor="ctr">
-            <a:spAutoFit/>
+            <a:noAutofit/>
           </a:bodyPr>
           <a:lstStyle/>
           <a:p>
@@ -7658,8 +7658,8 @@
         </p:nvSpPr>
         <p:spPr>
           <a:xfrm>
-            <a:off x="1231391" y="2080260"/>
-            <a:ext cx="4846320" cy="457200"/>
+            <a:off x="1450361" y="2080260"/>
+            <a:ext cx="4697470" cy="457200"/>
           </a:xfrm>
           <a:prstGeom prst="rect">
             <a:avLst/>
@@ -7668,7 +7668,7 @@
         </p:spPr>
         <p:txBody>
           <a:bodyPr wrap="none" lIns="45720" rIns="45720" tIns="18288" bIns="18288" anchor="ctr">
-            <a:spAutoFit/>
+            <a:noAutofit/>
           </a:bodyPr>
           <a:lstStyle/>
           <a:p>
@@ -7687,7 +7687,7 @@
       </p:sp>
       <p:pic>
         <p:nvPicPr>
-          <p:cNvPr id="10" name="Picture 9" descr="ba81893977cc2ed5.png"/>
+          <p:cNvPr id="10" name="Picture 9" descr="ca87a5b7cdff0592.png"/>
           <p:cNvPicPr>
             <a:picLocks noChangeAspect="1"/>
           </p:cNvPicPr>
@@ -7701,7 +7701,7 @@
         </p:blipFill>
         <p:spPr>
           <a:xfrm>
-            <a:off x="5940551" y="2135124"/>
+            <a:off x="6010671" y="2135124"/>
             <a:ext cx="1392936" cy="347472"/>
           </a:xfrm>
           <a:prstGeom prst="rect">
@@ -7717,8 +7717,8 @@
         </p:nvSpPr>
         <p:spPr>
           <a:xfrm>
-            <a:off x="7333488" y="2080260"/>
-            <a:ext cx="1583944" cy="457200"/>
+            <a:off x="7403607" y="2080260"/>
+            <a:ext cx="1381716" cy="457200"/>
           </a:xfrm>
           <a:prstGeom prst="rect">
             <a:avLst/>
@@ -7727,7 +7727,7 @@
         </p:spPr>
         <p:txBody>
           <a:bodyPr wrap="none" lIns="45720" rIns="45720" tIns="18288" bIns="18288" anchor="ctr">
-            <a:spAutoFit/>
+            <a:noAutofit/>
           </a:bodyPr>
           <a:lstStyle/>
           <a:p>
@@ -7746,7 +7746,7 @@
       </p:sp>
       <p:pic>
         <p:nvPicPr>
-          <p:cNvPr id="12" name="Picture 11" descr="711dc73e4b84c61f.png"/>
+          <p:cNvPr id="12" name="Picture 11" descr="39148797183f8f68.png"/>
           <p:cNvPicPr>
             <a:picLocks noChangeAspect="1"/>
           </p:cNvPicPr>
@@ -7760,8 +7760,8 @@
         </p:blipFill>
         <p:spPr>
           <a:xfrm>
-            <a:off x="8780272" y="2133599"/>
-            <a:ext cx="1389888" cy="350520"/>
+            <a:off x="8648163" y="2133599"/>
+            <a:ext cx="1386840" cy="350520"/>
           </a:xfrm>
           <a:prstGeom prst="rect">
             <a:avLst/>
@@ -7776,8 +7776,8 @@
         </p:nvSpPr>
         <p:spPr>
           <a:xfrm>
-            <a:off x="10170160" y="2080260"/>
-            <a:ext cx="897128" cy="457200"/>
+            <a:off x="10035003" y="2080260"/>
+            <a:ext cx="813314" cy="457200"/>
           </a:xfrm>
           <a:prstGeom prst="rect">
             <a:avLst/>
@@ -7786,7 +7786,7 @@
         </p:spPr>
         <p:txBody>
           <a:bodyPr wrap="none" lIns="45720" rIns="45720" tIns="18288" bIns="18288" anchor="ctr">
-            <a:spAutoFit/>
+            <a:noAutofit/>
           </a:bodyPr>
           <a:lstStyle/>
           <a:p>
@@ -8267,8 +8267,8 @@
         </p:nvSpPr>
         <p:spPr>
           <a:xfrm>
-            <a:off x="1216659" y="2692908"/>
-            <a:ext cx="7593584" cy="457200"/>
+            <a:off x="1551793" y="2692908"/>
+            <a:ext cx="6997736" cy="457200"/>
           </a:xfrm>
           <a:prstGeom prst="rect">
             <a:avLst/>
@@ -8277,7 +8277,7 @@
         </p:spPr>
         <p:txBody>
           <a:bodyPr wrap="none" lIns="45720" rIns="45720" tIns="18288" bIns="18288" anchor="ctr">
-            <a:spAutoFit/>
+            <a:noAutofit/>
           </a:bodyPr>
           <a:lstStyle/>
           <a:p>
@@ -8310,7 +8310,7 @@
         </p:blipFill>
         <p:spPr>
           <a:xfrm>
-            <a:off x="8673084" y="2744724"/>
+            <a:off x="8412370" y="2744724"/>
             <a:ext cx="2026920" cy="353568"/>
           </a:xfrm>
           <a:prstGeom prst="rect">
@@ -8326,8 +8326,8 @@
         </p:nvSpPr>
         <p:spPr>
           <a:xfrm>
-            <a:off x="10700004" y="2692908"/>
-            <a:ext cx="382016" cy="457200"/>
+            <a:off x="10439290" y="2692908"/>
+            <a:ext cx="307595" cy="457200"/>
           </a:xfrm>
           <a:prstGeom prst="rect">
             <a:avLst/>
@@ -8336,7 +8336,7 @@
         </p:spPr>
         <p:txBody>
           <a:bodyPr wrap="none" lIns="45720" rIns="45720" tIns="18288" bIns="18288" anchor="ctr">
-            <a:spAutoFit/>
+            <a:noAutofit/>
           </a:bodyPr>
           <a:lstStyle/>
           <a:p>
@@ -8730,7 +8730,7 @@
         <p:spPr>
           <a:xfrm>
             <a:off x="1874519" y="1760220"/>
-            <a:ext cx="969771" cy="457200"/>
+            <a:ext cx="720605" cy="457200"/>
           </a:xfrm>
           <a:prstGeom prst="rect">
             <a:avLst/>
@@ -8739,7 +8739,7 @@
         </p:spPr>
         <p:txBody>
           <a:bodyPr wrap="none" lIns="45720" rIns="45720" tIns="18288" bIns="18288" anchor="ctr">
-            <a:spAutoFit/>
+            <a:noAutofit/>
           </a:bodyPr>
           <a:lstStyle/>
           <a:p>
@@ -8772,7 +8772,7 @@
         </p:blipFill>
         <p:spPr>
           <a:xfrm>
-            <a:off x="2707132" y="1821180"/>
+            <a:off x="2457965" y="1821180"/>
             <a:ext cx="2441448" cy="335280"/>
           </a:xfrm>
           <a:prstGeom prst="rect">
@@ -8789,7 +8789,7 @@
         <p:spPr>
           <a:xfrm>
             <a:off x="1874519" y="2372868"/>
-            <a:ext cx="969771" cy="457200"/>
+            <a:ext cx="726811" cy="457200"/>
           </a:xfrm>
           <a:prstGeom prst="rect">
             <a:avLst/>
@@ -8798,7 +8798,7 @@
         </p:spPr>
         <p:txBody>
           <a:bodyPr wrap="none" lIns="45720" rIns="45720" tIns="18288" bIns="18288" anchor="ctr">
-            <a:spAutoFit/>
+            <a:noAutofit/>
           </a:bodyPr>
           <a:lstStyle/>
           <a:p>
@@ -8831,7 +8831,7 @@
         </p:blipFill>
         <p:spPr>
           <a:xfrm>
-            <a:off x="2707132" y="2433828"/>
+            <a:off x="2464171" y="2433828"/>
             <a:ext cx="3099816" cy="335280"/>
           </a:xfrm>
           <a:prstGeom prst="rect">
@@ -8848,7 +8848,7 @@
         <p:spPr>
           <a:xfrm>
             <a:off x="1874519" y="2985516"/>
-            <a:ext cx="6893560" cy="457200"/>
+            <a:ext cx="5997709" cy="457200"/>
           </a:xfrm>
           <a:prstGeom prst="rect">
             <a:avLst/>
@@ -8857,7 +8857,7 @@
         </p:spPr>
         <p:txBody>
           <a:bodyPr wrap="none" lIns="45720" rIns="45720" tIns="18288" bIns="18288" anchor="ctr">
-            <a:spAutoFit/>
+            <a:noAutofit/>
           </a:bodyPr>
           <a:lstStyle/>
           <a:p>
@@ -8883,7 +8883,7 @@
         <p:spPr>
           <a:xfrm>
             <a:off x="1874519" y="3598164"/>
-            <a:ext cx="6893560" cy="457200"/>
+            <a:ext cx="6461623" cy="457200"/>
           </a:xfrm>
           <a:prstGeom prst="rect">
             <a:avLst/>
@@ -8892,7 +8892,7 @@
         </p:spPr>
         <p:txBody>
           <a:bodyPr wrap="none" lIns="45720" rIns="45720" tIns="18288" bIns="18288" anchor="ctr">
-            <a:spAutoFit/>
+            <a:noAutofit/>
           </a:bodyPr>
           <a:lstStyle/>
           <a:p>
@@ -9215,8 +9215,8 @@
         </p:nvSpPr>
         <p:spPr>
           <a:xfrm>
-            <a:off x="1216659" y="2601468"/>
-            <a:ext cx="7593584" cy="457200"/>
+            <a:off x="1551793" y="2601468"/>
+            <a:ext cx="6997736" cy="457200"/>
           </a:xfrm>
           <a:prstGeom prst="rect">
             <a:avLst/>
@@ -9225,7 +9225,7 @@
         </p:spPr>
         <p:txBody>
           <a:bodyPr wrap="none" lIns="45720" rIns="45720" tIns="18288" bIns="18288" anchor="ctr">
-            <a:spAutoFit/>
+            <a:noAutofit/>
           </a:bodyPr>
           <a:lstStyle/>
           <a:p>
@@ -9244,7 +9244,7 @@
       </p:sp>
       <p:pic>
         <p:nvPicPr>
-          <p:cNvPr id="11" name="Picture 10" descr="f1f759a641dda94a.png"/>
+          <p:cNvPr id="11" name="Picture 10" descr="b1203184ca7f2d67.png"/>
           <p:cNvPicPr>
             <a:picLocks noChangeAspect="1"/>
           </p:cNvPicPr>
@@ -9258,7 +9258,7 @@
         </p:blipFill>
         <p:spPr>
           <a:xfrm>
-            <a:off x="8673084" y="2653284"/>
+            <a:off x="8412370" y="2653284"/>
             <a:ext cx="2026920" cy="353568"/>
           </a:xfrm>
           <a:prstGeom prst="rect">
@@ -9274,8 +9274,8 @@
         </p:nvSpPr>
         <p:spPr>
           <a:xfrm>
-            <a:off x="10700004" y="2601468"/>
-            <a:ext cx="382016" cy="457200"/>
+            <a:off x="10439290" y="2601468"/>
+            <a:ext cx="307595" cy="457200"/>
           </a:xfrm>
           <a:prstGeom prst="rect">
             <a:avLst/>
@@ -9284,7 +9284,7 @@
         </p:spPr>
         <p:txBody>
           <a:bodyPr wrap="none" lIns="45720" rIns="45720" tIns="18288" bIns="18288" anchor="ctr">
-            <a:spAutoFit/>
+            <a:noAutofit/>
           </a:bodyPr>
           <a:lstStyle/>
           <a:p>
@@ -9694,7 +9694,7 @@
         </p:blipFill>
         <p:spPr>
           <a:xfrm>
-            <a:off x="1887727" y="2194560"/>
+            <a:off x="1990170" y="2194560"/>
             <a:ext cx="4020312" cy="411480"/>
           </a:xfrm>
           <a:prstGeom prst="rect">
@@ -9710,8 +9710,8 @@
         </p:nvSpPr>
         <p:spPr>
           <a:xfrm>
-            <a:off x="5908039" y="2171700"/>
-            <a:ext cx="4502912" cy="457200"/>
+            <a:off x="6010482" y="2171700"/>
+            <a:ext cx="4298027" cy="457200"/>
           </a:xfrm>
           <a:prstGeom prst="rect">
             <a:avLst/>
@@ -9720,7 +9720,7 @@
         </p:spPr>
         <p:txBody>
           <a:bodyPr wrap="none" lIns="45720" rIns="45720" tIns="18288" bIns="18288" anchor="ctr">
-            <a:spAutoFit/>
+            <a:noAutofit/>
           </a:bodyPr>
           <a:lstStyle/>
           <a:p>
@@ -10107,7 +10107,7 @@
       </p:sp>
       <p:pic>
         <p:nvPicPr>
-          <p:cNvPr id="9" name="Picture 8" descr="3f644ac48482c852.png"/>
+          <p:cNvPr id="9" name="Picture 8" descr="da2ed7f30b8d3f5c.png"/>
           <p:cNvPicPr>
             <a:picLocks noChangeAspect="1"/>
           </p:cNvPicPr>
@@ -10121,8 +10121,8 @@
         </p:blipFill>
         <p:spPr>
           <a:xfrm>
-            <a:off x="1887727" y="2103120"/>
-            <a:ext cx="4020312" cy="411480"/>
+            <a:off x="1988646" y="2104643"/>
+            <a:ext cx="4023360" cy="408432"/>
           </a:xfrm>
           <a:prstGeom prst="rect">
             <a:avLst/>
@@ -10137,8 +10137,8 @@
         </p:nvSpPr>
         <p:spPr>
           <a:xfrm>
-            <a:off x="5908039" y="2080260"/>
-            <a:ext cx="4502912" cy="457200"/>
+            <a:off x="6012006" y="2080260"/>
+            <a:ext cx="4298027" cy="457200"/>
           </a:xfrm>
           <a:prstGeom prst="rect">
             <a:avLst/>
@@ -10147,7 +10147,7 @@
         </p:spPr>
         <p:txBody>
           <a:bodyPr wrap="none" lIns="45720" rIns="45720" tIns="18288" bIns="18288" anchor="ctr">
-            <a:spAutoFit/>
+            <a:noAutofit/>
           </a:bodyPr>
           <a:lstStyle/>
           <a:p>
@@ -10668,7 +10668,7 @@
                 </a:solidFill>
                 <a:latin typeface="Century Schoolbook"/>
               </a:rPr>
-              <a:t>3</a:t>
+              <a:t>2</a:t>
             </a:r>
           </a:p>
         </p:txBody>
@@ -10756,7 +10756,7 @@
                 </a:solidFill>
                 <a:latin typeface="Century Schoolbook"/>
               </a:rPr>
-              <a:t>2</a:t>
+              <a:t>3</a:t>
             </a:r>
           </a:p>
         </p:txBody>
@@ -11177,7 +11177,7 @@
                 </a:solidFill>
                 <a:latin typeface="Century Schoolbook"/>
               </a:rPr>
-              <a:t>3</a:t>
+              <a:t>2</a:t>
             </a:r>
           </a:p>
         </p:txBody>
@@ -11265,7 +11265,7 @@
                 </a:solidFill>
                 <a:latin typeface="Century Schoolbook"/>
               </a:rPr>
-              <a:t>2</a:t>
+              <a:t>3</a:t>
             </a:r>
           </a:p>
         </p:txBody>
@@ -11576,8 +11576,8 @@
         </p:nvSpPr>
         <p:spPr>
           <a:xfrm>
-            <a:off x="1351787" y="2171700"/>
-            <a:ext cx="3987800" cy="457200"/>
+            <a:off x="1553414" y="2171700"/>
+            <a:ext cx="3903212" cy="457200"/>
           </a:xfrm>
           <a:prstGeom prst="rect">
             <a:avLst/>
@@ -11586,7 +11586,7 @@
         </p:spPr>
         <p:txBody>
           <a:bodyPr wrap="none" lIns="45720" rIns="45720" tIns="18288" bIns="18288" anchor="ctr">
-            <a:spAutoFit/>
+            <a:noAutofit/>
           </a:bodyPr>
           <a:lstStyle/>
           <a:p>
@@ -11619,7 +11619,7 @@
         </p:blipFill>
         <p:spPr>
           <a:xfrm>
-            <a:off x="5202427" y="2226564"/>
+            <a:off x="5319466" y="2226564"/>
             <a:ext cx="1423416" cy="347472"/>
           </a:xfrm>
           <a:prstGeom prst="rect">
@@ -11635,8 +11635,8 @@
         </p:nvSpPr>
         <p:spPr>
           <a:xfrm>
-            <a:off x="6625843" y="2171700"/>
-            <a:ext cx="1755648" cy="457200"/>
+            <a:off x="6742882" y="2171700"/>
+            <a:ext cx="1537107" cy="457200"/>
           </a:xfrm>
           <a:prstGeom prst="rect">
             <a:avLst/>
@@ -11645,7 +11645,7 @@
         </p:spPr>
         <p:txBody>
           <a:bodyPr wrap="none" lIns="45720" rIns="45720" tIns="18288" bIns="18288" anchor="ctr">
-            <a:spAutoFit/>
+            <a:noAutofit/>
           </a:bodyPr>
           <a:lstStyle/>
           <a:p>
@@ -11678,7 +11678,7 @@
         </p:blipFill>
         <p:spPr>
           <a:xfrm>
-            <a:off x="8244331" y="2226564"/>
+            <a:off x="8142830" y="2226564"/>
             <a:ext cx="1633728" cy="347472"/>
           </a:xfrm>
           <a:prstGeom prst="rect">
@@ -11694,8 +11694,8 @@
         </p:nvSpPr>
         <p:spPr>
           <a:xfrm>
-            <a:off x="9878060" y="2171700"/>
-            <a:ext cx="1068832" cy="457200"/>
+            <a:off x="9776558" y="2171700"/>
+            <a:ext cx="968706" cy="457200"/>
           </a:xfrm>
           <a:prstGeom prst="rect">
             <a:avLst/>
@@ -11704,7 +11704,7 @@
         </p:spPr>
         <p:txBody>
           <a:bodyPr wrap="none" lIns="45720" rIns="45720" tIns="18288" bIns="18288" anchor="ctr">
-            <a:spAutoFit/>
+            <a:noAutofit/>
           </a:bodyPr>
           <a:lstStyle/>
           <a:p>
@@ -11795,7 +11795,7 @@
                 </a:solidFill>
                 <a:latin typeface="Century Schoolbook"/>
               </a:rPr>
-              <a:t>2.6 × 10</a:t>
+              <a:t>26.1 × 10</a:t>
             </a:r>
             <a:r>
               <a:rPr sz="2400" b="0" i="0" baseline="30000">
@@ -11804,7 +11804,7 @@
                 </a:solidFill>
                 <a:latin typeface="Century Schoolbook"/>
               </a:rPr>
-              <a:t>5</a:t>
+              <a:t>4</a:t>
             </a:r>
             <a:r>
               <a:rPr sz="2400" b="0" i="0">
@@ -11866,7 +11866,7 @@
                 </a:solidFill>
                 <a:latin typeface="Century Schoolbook"/>
               </a:rPr>
-              <a:t>2.61 × 10</a:t>
+              <a:t>2.6 × 10</a:t>
             </a:r>
             <a:r>
               <a:rPr sz="2400" b="0" i="0" baseline="30000">
@@ -11937,7 +11937,7 @@
                 </a:solidFill>
                 <a:latin typeface="Century Schoolbook"/>
               </a:rPr>
-              <a:t>26.1 × 10</a:t>
+              <a:t>2.6 × 10</a:t>
             </a:r>
             <a:r>
               <a:rPr sz="2400" b="0" i="0" baseline="30000">
@@ -12008,7 +12008,7 @@
                 </a:solidFill>
                 <a:latin typeface="Century Schoolbook"/>
               </a:rPr>
-              <a:t>2.6 × 10</a:t>
+              <a:t>2.61 × 10</a:t>
             </a:r>
             <a:r>
               <a:rPr sz="2400" b="0" i="0" baseline="30000">
@@ -12017,7 +12017,7 @@
                 </a:solidFill>
                 <a:latin typeface="Century Schoolbook"/>
               </a:rPr>
-              <a:t>4</a:t>
+              <a:t>5</a:t>
             </a:r>
             <a:r>
               <a:rPr sz="2400" b="0" i="0">
@@ -12346,8 +12346,8 @@
         </p:nvSpPr>
         <p:spPr>
           <a:xfrm>
-            <a:off x="1351787" y="2080260"/>
-            <a:ext cx="3987800" cy="457200"/>
+            <a:off x="1551890" y="2080260"/>
+            <a:ext cx="3903212" cy="457200"/>
           </a:xfrm>
           <a:prstGeom prst="rect">
             <a:avLst/>
@@ -12356,7 +12356,7 @@
         </p:spPr>
         <p:txBody>
           <a:bodyPr wrap="none" lIns="45720" rIns="45720" tIns="18288" bIns="18288" anchor="ctr">
-            <a:spAutoFit/>
+            <a:noAutofit/>
           </a:bodyPr>
           <a:lstStyle/>
           <a:p>
@@ -12375,7 +12375,7 @@
       </p:sp>
       <p:pic>
         <p:nvPicPr>
-          <p:cNvPr id="10" name="Picture 9" descr="64bbdc3030162890.png"/>
+          <p:cNvPr id="10" name="Picture 9" descr="2040ebaec58d50e4.png"/>
           <p:cNvPicPr>
             <a:picLocks noChangeAspect="1"/>
           </p:cNvPicPr>
@@ -12389,8 +12389,8 @@
         </p:blipFill>
         <p:spPr>
           <a:xfrm>
-            <a:off x="5202427" y="2135124"/>
-            <a:ext cx="1423416" cy="347472"/>
+            <a:off x="5317942" y="2135124"/>
+            <a:ext cx="1426464" cy="347472"/>
           </a:xfrm>
           <a:prstGeom prst="rect">
             <a:avLst/>
@@ -12405,8 +12405,8 @@
         </p:nvSpPr>
         <p:spPr>
           <a:xfrm>
-            <a:off x="6625843" y="2080260"/>
-            <a:ext cx="1755648" cy="457200"/>
+            <a:off x="6744406" y="2080260"/>
+            <a:ext cx="1537107" cy="457200"/>
           </a:xfrm>
           <a:prstGeom prst="rect">
             <a:avLst/>
@@ -12415,7 +12415,7 @@
         </p:spPr>
         <p:txBody>
           <a:bodyPr wrap="none" lIns="45720" rIns="45720" tIns="18288" bIns="18288" anchor="ctr">
-            <a:spAutoFit/>
+            <a:noAutofit/>
           </a:bodyPr>
           <a:lstStyle/>
           <a:p>
@@ -12434,7 +12434,7 @@
       </p:sp>
       <p:pic>
         <p:nvPicPr>
-          <p:cNvPr id="12" name="Picture 11" descr="feb742ea3ba69b7c.png"/>
+          <p:cNvPr id="12" name="Picture 11" descr="7f74096cc598f7b1.png"/>
           <p:cNvPicPr>
             <a:picLocks noChangeAspect="1"/>
           </p:cNvPicPr>
@@ -12448,7 +12448,7 @@
         </p:blipFill>
         <p:spPr>
           <a:xfrm>
-            <a:off x="8244331" y="2135124"/>
+            <a:off x="8144354" y="2135124"/>
             <a:ext cx="1633728" cy="347472"/>
           </a:xfrm>
           <a:prstGeom prst="rect">
@@ -12464,8 +12464,8 @@
         </p:nvSpPr>
         <p:spPr>
           <a:xfrm>
-            <a:off x="9878060" y="2080260"/>
-            <a:ext cx="1068832" cy="457200"/>
+            <a:off x="9778082" y="2080260"/>
+            <a:ext cx="968706" cy="457200"/>
           </a:xfrm>
           <a:prstGeom prst="rect">
             <a:avLst/>
@@ -12474,7 +12474,7 @@
         </p:spPr>
         <p:txBody>
           <a:bodyPr wrap="none" lIns="45720" rIns="45720" tIns="18288" bIns="18288" anchor="ctr">
-            <a:spAutoFit/>
+            <a:noAutofit/>
           </a:bodyPr>
           <a:lstStyle/>
           <a:p>
@@ -12552,43 +12552,43 @@
             <a:r>
               <a:rPr sz="2400" b="1" i="0">
                 <a:solidFill>
-                  <a:srgbClr val="9E1B32"/>
+                  <a:srgbClr val="1A1A1A"/>
                 </a:solidFill>
                 <a:latin typeface="Century Schoolbook"/>
               </a:rPr>
               <a:t>A.   </a:t>
             </a:r>
             <a:r>
-              <a:rPr sz="2400" b="1" i="0">
-                <a:solidFill>
-                  <a:srgbClr val="9E1B32"/>
-                </a:solidFill>
-                <a:latin typeface="Century Schoolbook"/>
-              </a:rPr>
-              <a:t>2.6 × 10</a:t>
-            </a:r>
-            <a:r>
-              <a:rPr sz="2400" b="1" i="0" baseline="30000">
-                <a:solidFill>
-                  <a:srgbClr val="9E1B32"/>
-                </a:solidFill>
-                <a:latin typeface="Century Schoolbook"/>
-              </a:rPr>
-              <a:t>5</a:t>
-            </a:r>
-            <a:r>
-              <a:rPr sz="2400" b="1" i="0">
-                <a:solidFill>
-                  <a:srgbClr val="9E1B32"/>
+              <a:rPr sz="2400" b="0" i="0">
+                <a:solidFill>
+                  <a:srgbClr val="1A1A1A"/>
+                </a:solidFill>
+                <a:latin typeface="Century Schoolbook"/>
+              </a:rPr>
+              <a:t>26.1 × 10</a:t>
+            </a:r>
+            <a:r>
+              <a:rPr sz="2400" b="0" i="0" baseline="30000">
+                <a:solidFill>
+                  <a:srgbClr val="1A1A1A"/>
+                </a:solidFill>
+                <a:latin typeface="Century Schoolbook"/>
+              </a:rPr>
+              <a:t>4</a:t>
+            </a:r>
+            <a:r>
+              <a:rPr sz="2400" b="0" i="0">
+                <a:solidFill>
+                  <a:srgbClr val="1A1A1A"/>
                 </a:solidFill>
                 <a:latin typeface="Century Schoolbook"/>
               </a:rPr>
               <a:t> cm</a:t>
             </a:r>
             <a:r>
-              <a:rPr sz="2400" b="1" i="0" baseline="30000">
-                <a:solidFill>
-                  <a:srgbClr val="9E1B32"/>
+              <a:rPr sz="2400" b="0" i="0" baseline="30000">
+                <a:solidFill>
+                  <a:srgbClr val="1A1A1A"/>
                 </a:solidFill>
                 <a:latin typeface="Century Schoolbook"/>
               </a:rPr>
@@ -12623,43 +12623,43 @@
             <a:r>
               <a:rPr sz="2400" b="1" i="0">
                 <a:solidFill>
-                  <a:srgbClr val="1A1A1A"/>
+                  <a:srgbClr val="9E1B32"/>
                 </a:solidFill>
                 <a:latin typeface="Century Schoolbook"/>
               </a:rPr>
               <a:t>B.   </a:t>
             </a:r>
             <a:r>
-              <a:rPr sz="2400" b="0" i="0">
-                <a:solidFill>
-                  <a:srgbClr val="1A1A1A"/>
-                </a:solidFill>
-                <a:latin typeface="Century Schoolbook"/>
-              </a:rPr>
-              <a:t>2.61 × 10</a:t>
-            </a:r>
-            <a:r>
-              <a:rPr sz="2400" b="0" i="0" baseline="30000">
-                <a:solidFill>
-                  <a:srgbClr val="1A1A1A"/>
+              <a:rPr sz="2400" b="1" i="0">
+                <a:solidFill>
+                  <a:srgbClr val="9E1B32"/>
+                </a:solidFill>
+                <a:latin typeface="Century Schoolbook"/>
+              </a:rPr>
+              <a:t>2.6 × 10</a:t>
+            </a:r>
+            <a:r>
+              <a:rPr sz="2400" b="1" i="0" baseline="30000">
+                <a:solidFill>
+                  <a:srgbClr val="9E1B32"/>
                 </a:solidFill>
                 <a:latin typeface="Century Schoolbook"/>
               </a:rPr>
               <a:t>5</a:t>
             </a:r>
             <a:r>
-              <a:rPr sz="2400" b="0" i="0">
-                <a:solidFill>
-                  <a:srgbClr val="1A1A1A"/>
+              <a:rPr sz="2400" b="1" i="0">
+                <a:solidFill>
+                  <a:srgbClr val="9E1B32"/>
                 </a:solidFill>
                 <a:latin typeface="Century Schoolbook"/>
               </a:rPr>
               <a:t> cm</a:t>
             </a:r>
             <a:r>
-              <a:rPr sz="2400" b="0" i="0" baseline="30000">
-                <a:solidFill>
-                  <a:srgbClr val="1A1A1A"/>
+              <a:rPr sz="2400" b="1" i="0" baseline="30000">
+                <a:solidFill>
+                  <a:srgbClr val="9E1B32"/>
                 </a:solidFill>
                 <a:latin typeface="Century Schoolbook"/>
               </a:rPr>
@@ -12707,7 +12707,7 @@
                 </a:solidFill>
                 <a:latin typeface="Century Schoolbook"/>
               </a:rPr>
-              <a:t>26.1 × 10</a:t>
+              <a:t>2.6 × 10</a:t>
             </a:r>
             <a:r>
               <a:rPr sz="2400" b="0" i="0" baseline="30000">
@@ -12778,7 +12778,7 @@
                 </a:solidFill>
                 <a:latin typeface="Century Schoolbook"/>
               </a:rPr>
-              <a:t>2.6 × 10</a:t>
+              <a:t>2.61 × 10</a:t>
             </a:r>
             <a:r>
               <a:rPr sz="2400" b="0" i="0" baseline="30000">
@@ -12787,7 +12787,7 @@
                 </a:solidFill>
                 <a:latin typeface="Century Schoolbook"/>
               </a:rPr>
-              <a:t>4</a:t>
+              <a:t>5</a:t>
             </a:r>
             <a:r>
               <a:rPr sz="2400" b="0" i="0">
@@ -12840,7 +12840,7 @@
                 </a:solidFill>
                 <a:latin typeface="Century Schoolbook"/>
               </a:rPr>
-              <a:t>Answer:   A — 2.6 × 10</a:t>
+              <a:t>Answer:   B — 2.6 × 10</a:t>
             </a:r>
             <a:r>
               <a:rPr sz="3200" b="1" i="0" baseline="30000">
@@ -13143,8 +13143,8 @@
         </p:nvSpPr>
         <p:spPr>
           <a:xfrm>
-            <a:off x="2185924" y="2171700"/>
-            <a:ext cx="2785872" cy="457200"/>
+            <a:off x="2553822" y="2171700"/>
+            <a:ext cx="2456309" cy="457200"/>
           </a:xfrm>
           <a:prstGeom prst="rect">
             <a:avLst/>
@@ -13153,7 +13153,7 @@
         </p:spPr>
         <p:txBody>
           <a:bodyPr wrap="none" lIns="45720" rIns="45720" tIns="18288" bIns="18288" anchor="ctr">
-            <a:spAutoFit/>
+            <a:noAutofit/>
           </a:bodyPr>
           <a:lstStyle/>
           <a:p>
@@ -13186,7 +13186,7 @@
         </p:blipFill>
         <p:spPr>
           <a:xfrm>
-            <a:off x="4834636" y="2226564"/>
+            <a:off x="4872972" y="2226564"/>
             <a:ext cx="1633728" cy="347472"/>
           </a:xfrm>
           <a:prstGeom prst="rect">
@@ -13202,8 +13202,8 @@
         </p:nvSpPr>
         <p:spPr>
           <a:xfrm>
-            <a:off x="6468364" y="2171700"/>
-            <a:ext cx="3644392" cy="457200"/>
+            <a:off x="6506700" y="2171700"/>
+            <a:ext cx="3238157" cy="457200"/>
           </a:xfrm>
           <a:prstGeom prst="rect">
             <a:avLst/>
@@ -13212,7 +13212,7 @@
         </p:spPr>
         <p:txBody>
           <a:bodyPr wrap="none" lIns="45720" rIns="45720" tIns="18288" bIns="18288" anchor="ctr">
-            <a:spAutoFit/>
+            <a:noAutofit/>
           </a:bodyPr>
           <a:lstStyle/>
           <a:p>
@@ -13605,8 +13605,8 @@
         </p:nvSpPr>
         <p:spPr>
           <a:xfrm>
-            <a:off x="2185924" y="2080260"/>
-            <a:ext cx="2785872" cy="457200"/>
+            <a:off x="2553822" y="2080260"/>
+            <a:ext cx="2456309" cy="457200"/>
           </a:xfrm>
           <a:prstGeom prst="rect">
             <a:avLst/>
@@ -13615,7 +13615,7 @@
         </p:spPr>
         <p:txBody>
           <a:bodyPr wrap="none" lIns="45720" rIns="45720" tIns="18288" bIns="18288" anchor="ctr">
-            <a:spAutoFit/>
+            <a:noAutofit/>
           </a:bodyPr>
           <a:lstStyle/>
           <a:p>
@@ -13634,7 +13634,7 @@
       </p:sp>
       <p:pic>
         <p:nvPicPr>
-          <p:cNvPr id="10" name="Picture 9" descr="a0c3ce9052e643f0.png"/>
+          <p:cNvPr id="10" name="Picture 9" descr="cb8dbdba9896eb35.png"/>
           <p:cNvPicPr>
             <a:picLocks noChangeAspect="1"/>
           </p:cNvPicPr>
@@ -13648,7 +13648,7 @@
         </p:blipFill>
         <p:spPr>
           <a:xfrm>
-            <a:off x="4834636" y="2135124"/>
+            <a:off x="4872972" y="2135124"/>
             <a:ext cx="1633728" cy="347472"/>
           </a:xfrm>
           <a:prstGeom prst="rect">
@@ -13664,8 +13664,8 @@
         </p:nvSpPr>
         <p:spPr>
           <a:xfrm>
-            <a:off x="6468364" y="2080260"/>
-            <a:ext cx="3644392" cy="457200"/>
+            <a:off x="6506700" y="2080260"/>
+            <a:ext cx="3238157" cy="457200"/>
           </a:xfrm>
           <a:prstGeom prst="rect">
             <a:avLst/>
@@ -13674,7 +13674,7 @@
         </p:spPr>
         <p:txBody>
           <a:bodyPr wrap="none" lIns="45720" rIns="45720" tIns="18288" bIns="18288" anchor="ctr">
-            <a:spAutoFit/>
+            <a:noAutofit/>
           </a:bodyPr>
           <a:lstStyle/>
           <a:p>
@@ -14120,8 +14120,8 @@
         </p:nvSpPr>
         <p:spPr>
           <a:xfrm>
-            <a:off x="1562607" y="2746579"/>
-            <a:ext cx="897128" cy="457200"/>
+            <a:off x="1797016" y="2746579"/>
+            <a:ext cx="696416" cy="457200"/>
           </a:xfrm>
           <a:prstGeom prst="rect">
             <a:avLst/>
@@ -14130,7 +14130,7 @@
         </p:spPr>
         <p:txBody>
           <a:bodyPr wrap="none" lIns="45720" rIns="45720" tIns="18288" bIns="18288" anchor="ctr">
-            <a:spAutoFit/>
+            <a:noAutofit/>
           </a:bodyPr>
           <a:lstStyle/>
           <a:p>
@@ -14163,7 +14163,7 @@
         </p:blipFill>
         <p:spPr>
           <a:xfrm>
-            <a:off x="2322575" y="2799919"/>
+            <a:off x="2356273" y="2799919"/>
             <a:ext cx="1408176" cy="350520"/>
           </a:xfrm>
           <a:prstGeom prst="rect">
@@ -14179,8 +14179,8 @@
         </p:nvSpPr>
         <p:spPr>
           <a:xfrm>
-            <a:off x="3730751" y="2746579"/>
-            <a:ext cx="4846320" cy="457200"/>
+            <a:off x="3764449" y="2746579"/>
+            <a:ext cx="4662027" cy="457200"/>
           </a:xfrm>
           <a:prstGeom prst="rect">
             <a:avLst/>
@@ -14189,7 +14189,7 @@
         </p:spPr>
         <p:txBody>
           <a:bodyPr wrap="none" lIns="45720" rIns="45720" tIns="18288" bIns="18288" anchor="ctr">
-            <a:spAutoFit/>
+            <a:noAutofit/>
           </a:bodyPr>
           <a:lstStyle/>
           <a:p>
@@ -14240,7 +14240,7 @@
         </p:blipFill>
         <p:spPr>
           <a:xfrm>
-            <a:off x="8439912" y="2799919"/>
+            <a:off x="8289316" y="2799919"/>
             <a:ext cx="1399032" cy="350520"/>
           </a:xfrm>
           <a:prstGeom prst="rect">
@@ -14256,8 +14256,8 @@
         </p:nvSpPr>
         <p:spPr>
           <a:xfrm>
-            <a:off x="9838944" y="2746579"/>
-            <a:ext cx="897128" cy="457200"/>
+            <a:off x="9688348" y="2746579"/>
+            <a:ext cx="813314" cy="457200"/>
           </a:xfrm>
           <a:prstGeom prst="rect">
             <a:avLst/>
@@ -14266,7 +14266,7 @@
         </p:spPr>
         <p:txBody>
           <a:bodyPr wrap="none" lIns="45720" rIns="45720" tIns="18288" bIns="18288" anchor="ctr">
-            <a:spAutoFit/>
+            <a:noAutofit/>
           </a:bodyPr>
           <a:lstStyle/>
           <a:p>
@@ -14660,7 +14660,7 @@
         <p:spPr>
           <a:xfrm>
             <a:off x="1874519" y="1760220"/>
-            <a:ext cx="969771" cy="457200"/>
+            <a:ext cx="720605" cy="457200"/>
           </a:xfrm>
           <a:prstGeom prst="rect">
             <a:avLst/>
@@ -14669,7 +14669,7 @@
         </p:spPr>
         <p:txBody>
           <a:bodyPr wrap="none" lIns="45720" rIns="45720" tIns="18288" bIns="18288" anchor="ctr">
-            <a:spAutoFit/>
+            <a:noAutofit/>
           </a:bodyPr>
           <a:lstStyle/>
           <a:p>
@@ -14702,7 +14702,7 @@
         </p:blipFill>
         <p:spPr>
           <a:xfrm>
-            <a:off x="2707132" y="1821180"/>
+            <a:off x="2457965" y="1821180"/>
             <a:ext cx="2441448" cy="335280"/>
           </a:xfrm>
           <a:prstGeom prst="rect">
@@ -14718,8 +14718,8 @@
         </p:nvSpPr>
         <p:spPr>
           <a:xfrm>
-            <a:off x="5697220" y="1760220"/>
-            <a:ext cx="1735074" cy="457200"/>
+            <a:off x="5448053" y="1760220"/>
+            <a:ext cx="1451708" cy="457200"/>
           </a:xfrm>
           <a:prstGeom prst="rect">
             <a:avLst/>
@@ -14728,7 +14728,7 @@
         </p:spPr>
         <p:txBody>
           <a:bodyPr wrap="none" lIns="45720" rIns="45720" tIns="18288" bIns="18288" anchor="ctr">
-            <a:spAutoFit/>
+            <a:noAutofit/>
           </a:bodyPr>
           <a:lstStyle/>
           <a:p>
@@ -14763,7 +14763,7 @@
         <p:spPr>
           <a:xfrm>
             <a:off x="1874519" y="2372868"/>
-            <a:ext cx="969771" cy="457200"/>
+            <a:ext cx="726811" cy="457200"/>
           </a:xfrm>
           <a:prstGeom prst="rect">
             <a:avLst/>
@@ -14772,7 +14772,7 @@
         </p:spPr>
         <p:txBody>
           <a:bodyPr wrap="none" lIns="45720" rIns="45720" tIns="18288" bIns="18288" anchor="ctr">
-            <a:spAutoFit/>
+            <a:noAutofit/>
           </a:bodyPr>
           <a:lstStyle/>
           <a:p>
@@ -14805,7 +14805,7 @@
         </p:blipFill>
         <p:spPr>
           <a:xfrm>
-            <a:off x="2707132" y="2433828"/>
+            <a:off x="2464171" y="2433828"/>
             <a:ext cx="3099816" cy="335280"/>
           </a:xfrm>
           <a:prstGeom prst="rect">
@@ -14821,8 +14821,8 @@
         </p:nvSpPr>
         <p:spPr>
           <a:xfrm>
-            <a:off x="6355587" y="2372868"/>
-            <a:ext cx="1904492" cy="457200"/>
+            <a:off x="6112627" y="2372868"/>
+            <a:ext cx="1637178" cy="457200"/>
           </a:xfrm>
           <a:prstGeom prst="rect">
             <a:avLst/>
@@ -14831,7 +14831,7 @@
         </p:spPr>
         <p:txBody>
           <a:bodyPr wrap="none" lIns="45720" rIns="45720" tIns="18288" bIns="18288" anchor="ctr">
-            <a:spAutoFit/>
+            <a:noAutofit/>
           </a:bodyPr>
           <a:lstStyle/>
           <a:p>
@@ -14866,7 +14866,7 @@
         <p:spPr>
           <a:xfrm>
             <a:off x="1874519" y="2985516"/>
-            <a:ext cx="6893560" cy="457200"/>
+            <a:ext cx="5997709" cy="457200"/>
           </a:xfrm>
           <a:prstGeom prst="rect">
             <a:avLst/>
@@ -14875,7 +14875,7 @@
         </p:spPr>
         <p:txBody>
           <a:bodyPr wrap="none" lIns="45720" rIns="45720" tIns="18288" bIns="18288" anchor="ctr">
-            <a:spAutoFit/>
+            <a:noAutofit/>
           </a:bodyPr>
           <a:lstStyle/>
           <a:p>
@@ -14900,8 +14900,8 @@
         </p:nvSpPr>
         <p:spPr>
           <a:xfrm>
-            <a:off x="9179560" y="2985516"/>
-            <a:ext cx="2073909" cy="457200"/>
+            <a:off x="8283709" y="2985516"/>
+            <a:ext cx="1743665" cy="457200"/>
           </a:xfrm>
           <a:prstGeom prst="rect">
             <a:avLst/>
@@ -14910,7 +14910,7 @@
         </p:spPr>
         <p:txBody>
           <a:bodyPr wrap="none" lIns="45720" rIns="45720" tIns="18288" bIns="18288" anchor="ctr">
-            <a:spAutoFit/>
+            <a:noAutofit/>
           </a:bodyPr>
           <a:lstStyle/>
           <a:p>
@@ -14945,7 +14945,7 @@
         <p:spPr>
           <a:xfrm>
             <a:off x="1874519" y="3598164"/>
-            <a:ext cx="6893560" cy="457200"/>
+            <a:ext cx="6461623" cy="457200"/>
           </a:xfrm>
           <a:prstGeom prst="rect">
             <a:avLst/>
@@ -14954,7 +14954,7 @@
         </p:spPr>
         <p:txBody>
           <a:bodyPr wrap="none" lIns="45720" rIns="45720" tIns="18288" bIns="18288" anchor="ctr">
-            <a:spAutoFit/>
+            <a:noAutofit/>
           </a:bodyPr>
           <a:lstStyle/>
           <a:p>
@@ -14979,8 +14979,8 @@
         </p:nvSpPr>
         <p:spPr>
           <a:xfrm>
-            <a:off x="9179560" y="3598164"/>
-            <a:ext cx="887983" cy="457200"/>
+            <a:off x="8747623" y="3598164"/>
+            <a:ext cx="829616" cy="457200"/>
           </a:xfrm>
           <a:prstGeom prst="rect">
             <a:avLst/>
@@ -14989,7 +14989,7 @@
         </p:spPr>
         <p:txBody>
           <a:bodyPr wrap="none" lIns="45720" rIns="45720" tIns="18288" bIns="18288" anchor="ctr">
-            <a:spAutoFit/>
+            <a:noAutofit/>
           </a:bodyPr>
           <a:lstStyle/>
           <a:p>
@@ -15312,8 +15312,8 @@
         </p:nvSpPr>
         <p:spPr>
           <a:xfrm>
-            <a:off x="1562607" y="2655139"/>
-            <a:ext cx="897128" cy="457200"/>
+            <a:off x="1795492" y="2655139"/>
+            <a:ext cx="696416" cy="457200"/>
           </a:xfrm>
           <a:prstGeom prst="rect">
             <a:avLst/>
@@ -15322,7 +15322,7 @@
         </p:spPr>
         <p:txBody>
           <a:bodyPr wrap="none" lIns="45720" rIns="45720" tIns="18288" bIns="18288" anchor="ctr">
-            <a:spAutoFit/>
+            <a:noAutofit/>
           </a:bodyPr>
           <a:lstStyle/>
           <a:p>
@@ -15341,7 +15341,7 @@
       </p:sp>
       <p:pic>
         <p:nvPicPr>
-          <p:cNvPr id="11" name="Picture 10" descr="56b3c95944d22948.png"/>
+          <p:cNvPr id="11" name="Picture 10" descr="7257295b37188a90.png"/>
           <p:cNvPicPr>
             <a:picLocks noChangeAspect="1"/>
           </p:cNvPicPr>
@@ -15355,8 +15355,8 @@
         </p:blipFill>
         <p:spPr>
           <a:xfrm>
-            <a:off x="2322575" y="2708479"/>
-            <a:ext cx="1408176" cy="350520"/>
+            <a:off x="2354749" y="2708479"/>
+            <a:ext cx="1411224" cy="350520"/>
           </a:xfrm>
           <a:prstGeom prst="rect">
             <a:avLst/>
@@ -15371,8 +15371,8 @@
         </p:nvSpPr>
         <p:spPr>
           <a:xfrm>
-            <a:off x="3730751" y="2655139"/>
-            <a:ext cx="4846320" cy="457200"/>
+            <a:off x="3765973" y="2655139"/>
+            <a:ext cx="4662027" cy="457200"/>
           </a:xfrm>
           <a:prstGeom prst="rect">
             <a:avLst/>
@@ -15381,7 +15381,7 @@
         </p:spPr>
         <p:txBody>
           <a:bodyPr wrap="none" lIns="45720" rIns="45720" tIns="18288" bIns="18288" anchor="ctr">
-            <a:spAutoFit/>
+            <a:noAutofit/>
           </a:bodyPr>
           <a:lstStyle/>
           <a:p>
@@ -15418,7 +15418,7 @@
       </p:sp>
       <p:pic>
         <p:nvPicPr>
-          <p:cNvPr id="13" name="Picture 12" descr="05f1b129363955b5.png"/>
+          <p:cNvPr id="13" name="Picture 12" descr="94cb33e082284147.png"/>
           <p:cNvPicPr>
             <a:picLocks noChangeAspect="1"/>
           </p:cNvPicPr>
@@ -15432,7 +15432,7 @@
         </p:blipFill>
         <p:spPr>
           <a:xfrm>
-            <a:off x="8439912" y="2708479"/>
+            <a:off x="8290840" y="2708479"/>
             <a:ext cx="1399032" cy="350520"/>
           </a:xfrm>
           <a:prstGeom prst="rect">
@@ -15448,8 +15448,8 @@
         </p:nvSpPr>
         <p:spPr>
           <a:xfrm>
-            <a:off x="9838944" y="2655139"/>
-            <a:ext cx="897128" cy="457200"/>
+            <a:off x="9689872" y="2655139"/>
+            <a:ext cx="813314" cy="457200"/>
           </a:xfrm>
           <a:prstGeom prst="rect">
             <a:avLst/>
@@ -15458,7 +15458,7 @@
         </p:spPr>
         <p:txBody>
           <a:bodyPr wrap="none" lIns="45720" rIns="45720" tIns="18288" bIns="18288" anchor="ctr">
-            <a:spAutoFit/>
+            <a:noAutofit/>
           </a:bodyPr>
           <a:lstStyle/>
           <a:p>
@@ -15904,8 +15904,8 @@
         </p:nvSpPr>
         <p:spPr>
           <a:xfrm>
-            <a:off x="964184" y="2746579"/>
-            <a:ext cx="2270760" cy="457200"/>
+            <a:off x="1285728" y="2746579"/>
+            <a:ext cx="2146894" cy="457200"/>
           </a:xfrm>
           <a:prstGeom prst="rect">
             <a:avLst/>
@@ -15914,7 +15914,7 @@
         </p:spPr>
         <p:txBody>
           <a:bodyPr wrap="none" lIns="45720" rIns="45720" tIns="18288" bIns="18288" anchor="ctr">
-            <a:spAutoFit/>
+            <a:noAutofit/>
           </a:bodyPr>
           <a:lstStyle/>
           <a:p>
@@ -15947,7 +15947,7 @@
         </p:blipFill>
         <p:spPr>
           <a:xfrm>
-            <a:off x="3097784" y="2806015"/>
+            <a:off x="3295462" y="2806015"/>
             <a:ext cx="1764792" cy="338328"/>
           </a:xfrm>
           <a:prstGeom prst="rect">
@@ -15963,8 +15963,8 @@
         </p:nvSpPr>
         <p:spPr>
           <a:xfrm>
-            <a:off x="4862576" y="2746579"/>
-            <a:ext cx="4846320" cy="457200"/>
+            <a:off x="5060254" y="2746579"/>
+            <a:ext cx="4401516" cy="457200"/>
           </a:xfrm>
           <a:prstGeom prst="rect">
             <a:avLst/>
@@ -15973,7 +15973,7 @@
         </p:spPr>
         <p:txBody>
           <a:bodyPr wrap="none" lIns="45720" rIns="45720" tIns="18288" bIns="18288" anchor="ctr">
-            <a:spAutoFit/>
+            <a:noAutofit/>
           </a:bodyPr>
           <a:lstStyle/>
           <a:p>
@@ -16006,7 +16006,7 @@
         </p:blipFill>
         <p:spPr>
           <a:xfrm>
-            <a:off x="9571736" y="2799919"/>
+            <a:off x="9324611" y="2799919"/>
             <a:ext cx="1380744" cy="350520"/>
           </a:xfrm>
           <a:prstGeom prst="rect">
@@ -16022,8 +16022,8 @@
         </p:nvSpPr>
         <p:spPr>
           <a:xfrm>
-            <a:off x="10952480" y="2746579"/>
-            <a:ext cx="382016" cy="457200"/>
+            <a:off x="10705355" y="2746579"/>
+            <a:ext cx="307595" cy="457200"/>
           </a:xfrm>
           <a:prstGeom prst="rect">
             <a:avLst/>
@@ -16032,7 +16032,7 @@
         </p:spPr>
         <p:txBody>
           <a:bodyPr wrap="none" lIns="45720" rIns="45720" tIns="18288" bIns="18288" anchor="ctr">
-            <a:spAutoFit/>
+            <a:noAutofit/>
           </a:bodyPr>
           <a:lstStyle/>
           <a:p>
@@ -16460,8 +16460,8 @@
         </p:nvSpPr>
         <p:spPr>
           <a:xfrm>
-            <a:off x="964184" y="2655139"/>
-            <a:ext cx="2270760" cy="457200"/>
+            <a:off x="1285728" y="2655139"/>
+            <a:ext cx="2146894" cy="457200"/>
           </a:xfrm>
           <a:prstGeom prst="rect">
             <a:avLst/>
@@ -16470,7 +16470,7 @@
         </p:spPr>
         <p:txBody>
           <a:bodyPr wrap="none" lIns="45720" rIns="45720" tIns="18288" bIns="18288" anchor="ctr">
-            <a:spAutoFit/>
+            <a:noAutofit/>
           </a:bodyPr>
           <a:lstStyle/>
           <a:p>
@@ -16489,7 +16489,7 @@
       </p:sp>
       <p:pic>
         <p:nvPicPr>
-          <p:cNvPr id="11" name="Picture 10" descr="705d48a90c77f252.png"/>
+          <p:cNvPr id="11" name="Picture 10" descr="a825a716d0b1ce30.png"/>
           <p:cNvPicPr>
             <a:picLocks noChangeAspect="1"/>
           </p:cNvPicPr>
@@ -16503,7 +16503,7 @@
         </p:blipFill>
         <p:spPr>
           <a:xfrm>
-            <a:off x="3097784" y="2714575"/>
+            <a:off x="3295462" y="2714575"/>
             <a:ext cx="1764792" cy="338328"/>
           </a:xfrm>
           <a:prstGeom prst="rect">
@@ -16519,8 +16519,8 @@
         </p:nvSpPr>
         <p:spPr>
           <a:xfrm>
-            <a:off x="4862576" y="2655139"/>
-            <a:ext cx="4846320" cy="457200"/>
+            <a:off x="5060254" y="2655139"/>
+            <a:ext cx="4401516" cy="457200"/>
           </a:xfrm>
           <a:prstGeom prst="rect">
             <a:avLst/>
@@ -16529,7 +16529,7 @@
         </p:spPr>
         <p:txBody>
           <a:bodyPr wrap="none" lIns="45720" rIns="45720" tIns="18288" bIns="18288" anchor="ctr">
-            <a:spAutoFit/>
+            <a:noAutofit/>
           </a:bodyPr>
           <a:lstStyle/>
           <a:p>
@@ -16548,7 +16548,7 @@
       </p:sp>
       <p:pic>
         <p:nvPicPr>
-          <p:cNvPr id="13" name="Picture 12" descr="1a57ee4fc4052822.png"/>
+          <p:cNvPr id="13" name="Picture 12" descr="1d3c8ee25f946d95.png"/>
           <p:cNvPicPr>
             <a:picLocks noChangeAspect="1"/>
           </p:cNvPicPr>
@@ -16562,7 +16562,7 @@
         </p:blipFill>
         <p:spPr>
           <a:xfrm>
-            <a:off x="9571736" y="2708479"/>
+            <a:off x="9324611" y="2708479"/>
             <a:ext cx="1380744" cy="350520"/>
           </a:xfrm>
           <a:prstGeom prst="rect">
@@ -16578,8 +16578,8 @@
         </p:nvSpPr>
         <p:spPr>
           <a:xfrm>
-            <a:off x="10952480" y="2655139"/>
-            <a:ext cx="382016" cy="457200"/>
+            <a:off x="10705355" y="2655139"/>
+            <a:ext cx="307595" cy="457200"/>
           </a:xfrm>
           <a:prstGeom prst="rect">
             <a:avLst/>
@@ -16588,7 +16588,7 @@
         </p:spPr>
         <p:txBody>
           <a:bodyPr wrap="none" lIns="45720" rIns="45720" tIns="18288" bIns="18288" anchor="ctr">
-            <a:spAutoFit/>
+            <a:noAutofit/>
           </a:bodyPr>
           <a:lstStyle/>
           <a:p>
@@ -19110,7 +19110,7 @@
       </p:cxnSp>
       <p:pic>
         <p:nvPicPr>
-          <p:cNvPr id="10" name="Picture 9" descr="5d0e9527c3bedb0e.png"/>
+          <p:cNvPr id="10" name="Picture 9" descr="3a738e44a54142cf.png"/>
           <p:cNvPicPr>
             <a:picLocks noChangeAspect="1"/>
           </p:cNvPicPr>
@@ -19124,8 +19124,8 @@
         </p:blipFill>
         <p:spPr>
           <a:xfrm>
-            <a:off x="3044952" y="2340864"/>
-            <a:ext cx="6071616" cy="414528"/>
+            <a:off x="3043428" y="2340864"/>
+            <a:ext cx="6074664" cy="411480"/>
           </a:xfrm>
           <a:prstGeom prst="rect">
             <a:avLst/>
@@ -19140,8 +19140,8 @@
         </p:nvSpPr>
         <p:spPr>
           <a:xfrm>
-            <a:off x="803655" y="3006852"/>
-            <a:ext cx="9310624" cy="457200"/>
+            <a:off x="1305746" y="3003804"/>
+            <a:ext cx="8306442" cy="457200"/>
           </a:xfrm>
           <a:prstGeom prst="rect">
             <a:avLst/>
@@ -19150,7 +19150,7 @@
         </p:spPr>
         <p:txBody>
           <a:bodyPr wrap="none" lIns="45720" rIns="45720" tIns="18288" bIns="18288" anchor="ctr">
-            <a:spAutoFit/>
+            <a:noAutofit/>
           </a:bodyPr>
           <a:lstStyle/>
           <a:p>
@@ -19169,7 +19169,7 @@
       </p:sp>
       <p:pic>
         <p:nvPicPr>
-          <p:cNvPr id="12" name="Picture 11" descr="d5cd97bbf2239fbf.png"/>
+          <p:cNvPr id="12" name="Picture 11" descr="46d10cc3baed6a39.png"/>
           <p:cNvPicPr>
             <a:picLocks noChangeAspect="1"/>
           </p:cNvPicPr>
@@ -19183,7 +19183,7 @@
         </p:blipFill>
         <p:spPr>
           <a:xfrm>
-            <a:off x="9977120" y="3058668"/>
+            <a:off x="9475029" y="3055620"/>
             <a:ext cx="1380744" cy="353568"/>
           </a:xfrm>
           <a:prstGeom prst="rect">
@@ -19199,7 +19199,7 @@
         </p:nvSpPr>
         <p:spPr>
           <a:xfrm>
-            <a:off x="987552" y="3779520"/>
+            <a:off x="987552" y="3776472"/>
             <a:ext cx="10131551" cy="950976"/>
           </a:xfrm>
           <a:prstGeom prst="rect">
@@ -19561,7 +19561,7 @@
       </p:cxnSp>
       <p:pic>
         <p:nvPicPr>
-          <p:cNvPr id="11" name="Picture 10" descr="b931b36d54fc95c8.png"/>
+          <p:cNvPr id="11" name="Picture 10" descr="b19428082cb99cfa.png"/>
           <p:cNvPicPr>
             <a:picLocks noChangeAspect="1"/>
           </p:cNvPicPr>
@@ -19591,8 +19591,8 @@
         </p:nvSpPr>
         <p:spPr>
           <a:xfrm>
-            <a:off x="1322324" y="3003804"/>
-            <a:ext cx="9654032" cy="457200"/>
+            <a:off x="1794714" y="3003804"/>
+            <a:ext cx="8709251" cy="457200"/>
           </a:xfrm>
           <a:prstGeom prst="rect">
             <a:avLst/>
@@ -19601,7 +19601,7 @@
         </p:spPr>
         <p:txBody>
           <a:bodyPr wrap="none" lIns="45720" rIns="45720" tIns="18288" bIns="18288" anchor="ctr">
-            <a:spAutoFit/>
+            <a:noAutofit/>
           </a:bodyPr>
           <a:lstStyle/>
           <a:p>
@@ -19626,8 +19626,8 @@
         </p:nvSpPr>
         <p:spPr>
           <a:xfrm>
-            <a:off x="1233424" y="3689604"/>
-            <a:ext cx="6735064" cy="457200"/>
+            <a:off x="1561688" y="3689604"/>
+            <a:ext cx="6078534" cy="457200"/>
           </a:xfrm>
           <a:prstGeom prst="rect">
             <a:avLst/>
@@ -19636,7 +19636,7 @@
         </p:spPr>
         <p:txBody>
           <a:bodyPr wrap="none" lIns="45720" rIns="45720" tIns="18288" bIns="18288" anchor="ctr">
-            <a:spAutoFit/>
+            <a:noAutofit/>
           </a:bodyPr>
           <a:lstStyle/>
           <a:p>
@@ -19655,7 +19655,7 @@
       </p:sp>
       <p:pic>
         <p:nvPicPr>
-          <p:cNvPr id="14" name="Picture 13" descr="8fd148ddf879612b.png"/>
+          <p:cNvPr id="14" name="Picture 13" descr="4090bfd67d1032c8.png"/>
           <p:cNvPicPr>
             <a:picLocks noChangeAspect="1"/>
           </p:cNvPicPr>
@@ -19669,8 +19669,8 @@
         </p:blipFill>
         <p:spPr>
           <a:xfrm>
-            <a:off x="7831327" y="3720084"/>
-            <a:ext cx="3096768" cy="396240"/>
+            <a:off x="7503063" y="3718560"/>
+            <a:ext cx="3096768" cy="399288"/>
           </a:xfrm>
           <a:prstGeom prst="rect">
             <a:avLst/>
@@ -19983,8 +19983,8 @@
         </p:nvSpPr>
         <p:spPr>
           <a:xfrm>
-            <a:off x="1388363" y="2080260"/>
-            <a:ext cx="4331208" cy="457200"/>
+            <a:off x="1609368" y="2080260"/>
+            <a:ext cx="4175239" cy="457200"/>
           </a:xfrm>
           <a:prstGeom prst="rect">
             <a:avLst/>
@@ -19993,7 +19993,7 @@
         </p:spPr>
         <p:txBody>
           <a:bodyPr wrap="none" lIns="45720" rIns="45720" tIns="18288" bIns="18288" anchor="ctr">
-            <a:spAutoFit/>
+            <a:noAutofit/>
           </a:bodyPr>
           <a:lstStyle/>
           <a:p>
@@ -20026,7 +20026,7 @@
         </p:blipFill>
         <p:spPr>
           <a:xfrm>
-            <a:off x="5582412" y="2135124"/>
+            <a:off x="5647447" y="2135124"/>
             <a:ext cx="1594104" cy="347472"/>
           </a:xfrm>
           <a:prstGeom prst="rect">
@@ -20042,8 +20042,8 @@
         </p:nvSpPr>
         <p:spPr>
           <a:xfrm>
-            <a:off x="7176516" y="2080260"/>
-            <a:ext cx="1583944" cy="457200"/>
+            <a:off x="7241551" y="2080260"/>
+            <a:ext cx="1381716" cy="457200"/>
           </a:xfrm>
           <a:prstGeom prst="rect">
             <a:avLst/>
@@ -20052,7 +20052,7 @@
         </p:spPr>
         <p:txBody>
           <a:bodyPr wrap="none" lIns="45720" rIns="45720" tIns="18288" bIns="18288" anchor="ctr">
-            <a:spAutoFit/>
+            <a:noAutofit/>
           </a:bodyPr>
           <a:lstStyle/>
           <a:p>
@@ -20085,7 +20085,7 @@
         </p:blipFill>
         <p:spPr>
           <a:xfrm>
-            <a:off x="8623300" y="2133599"/>
+            <a:off x="8486108" y="2133599"/>
             <a:ext cx="1389888" cy="350520"/>
           </a:xfrm>
           <a:prstGeom prst="rect">
@@ -20101,8 +20101,8 @@
         </p:nvSpPr>
         <p:spPr>
           <a:xfrm>
-            <a:off x="10013188" y="2080260"/>
-            <a:ext cx="897128" cy="457200"/>
+            <a:off x="9875996" y="2080260"/>
+            <a:ext cx="813314" cy="457200"/>
           </a:xfrm>
           <a:prstGeom prst="rect">
             <a:avLst/>
@@ -20111,7 +20111,7 @@
         </p:spPr>
         <p:txBody>
           <a:bodyPr wrap="none" lIns="45720" rIns="45720" tIns="18288" bIns="18288" anchor="ctr">
-            <a:spAutoFit/>
+            <a:noAutofit/>
           </a:bodyPr>
           <a:lstStyle/>
           <a:p>
@@ -20463,7 +20463,7 @@
       </p:sp>
       <p:pic>
         <p:nvPicPr>
-          <p:cNvPr id="9" name="Picture 8" descr="901ed0ff20501b4e.png"/>
+          <p:cNvPr id="9" name="Picture 8" descr="8831760cab574e03.png"/>
           <p:cNvPicPr>
             <a:picLocks noChangeAspect="1"/>
           </p:cNvPicPr>
@@ -20478,7 +20478,7 @@
         <p:spPr>
           <a:xfrm>
             <a:off x="1828800" y="1920240"/>
-            <a:ext cx="5148072" cy="411480"/>
+            <a:ext cx="5151120" cy="408432"/>
           </a:xfrm>
           <a:prstGeom prst="rect">
             <a:avLst/>
@@ -20493,8 +20493,8 @@
         </p:nvSpPr>
         <p:spPr>
           <a:xfrm>
-            <a:off x="7434071" y="1897380"/>
-            <a:ext cx="3950208" cy="502920"/>
+            <a:off x="7437120" y="1895856"/>
+            <a:ext cx="3947160" cy="502920"/>
           </a:xfrm>
           <a:prstGeom prst="rect">
             <a:avLst/>
@@ -20522,7 +20522,7 @@
       </p:sp>
       <p:pic>
         <p:nvPicPr>
-          <p:cNvPr id="11" name="Picture 10" descr="ca6e9973d314df4a.png"/>
+          <p:cNvPr id="11" name="Picture 10" descr="30f7ea4290ce6530.png"/>
           <p:cNvPicPr>
             <a:picLocks noChangeAspect="1"/>
           </p:cNvPicPr>
@@ -20536,8 +20536,8 @@
         </p:blipFill>
         <p:spPr>
           <a:xfrm>
-            <a:off x="1828800" y="2606040"/>
-            <a:ext cx="5010912" cy="368808"/>
+            <a:off x="1828800" y="2602992"/>
+            <a:ext cx="5010912" cy="365760"/>
           </a:xfrm>
           <a:prstGeom prst="rect">
             <a:avLst/>
@@ -20552,7 +20552,7 @@
         </p:nvSpPr>
         <p:spPr>
           <a:xfrm>
-            <a:off x="7296912" y="2561844"/>
+            <a:off x="7296912" y="2557272"/>
             <a:ext cx="4087367" cy="502920"/>
           </a:xfrm>
           <a:prstGeom prst="rect">
@@ -20581,7 +20581,7 @@
       </p:sp>
       <p:pic>
         <p:nvPicPr>
-          <p:cNvPr id="13" name="Picture 12" descr="a95157ba00554535.png"/>
+          <p:cNvPr id="13" name="Picture 12" descr="ae705d3f714a20af.png"/>
           <p:cNvPicPr>
             <a:picLocks noChangeAspect="1"/>
           </p:cNvPicPr>
@@ -20595,8 +20595,8 @@
         </p:blipFill>
         <p:spPr>
           <a:xfrm>
-            <a:off x="1828800" y="3249168"/>
-            <a:ext cx="4517136" cy="396240"/>
+            <a:off x="1828800" y="3243072"/>
+            <a:ext cx="4517136" cy="402336"/>
           </a:xfrm>
           <a:prstGeom prst="rect">
             <a:avLst/>
@@ -20611,7 +20611,7 @@
         </p:nvSpPr>
         <p:spPr>
           <a:xfrm>
-            <a:off x="6803136" y="3218688"/>
+            <a:off x="6803136" y="3215640"/>
             <a:ext cx="4581143" cy="502920"/>
           </a:xfrm>
           <a:prstGeom prst="rect">
@@ -20962,8 +20962,8 @@
         </p:nvSpPr>
         <p:spPr>
           <a:xfrm>
-            <a:off x="1485899" y="2186940"/>
-            <a:ext cx="3300984" cy="457200"/>
+            <a:off x="1728695" y="2186940"/>
+            <a:ext cx="3101434" cy="457200"/>
           </a:xfrm>
           <a:prstGeom prst="rect">
             <a:avLst/>
@@ -20972,7 +20972,7 @@
         </p:spPr>
         <p:txBody>
           <a:bodyPr wrap="none" lIns="45720" rIns="45720" tIns="18288" bIns="18288" anchor="ctr">
-            <a:spAutoFit/>
+            <a:noAutofit/>
           </a:bodyPr>
           <a:lstStyle/>
           <a:p>
@@ -21005,7 +21005,7 @@
         </p:blipFill>
         <p:spPr>
           <a:xfrm>
-            <a:off x="4649723" y="2194560"/>
+            <a:off x="4692969" y="2194560"/>
             <a:ext cx="1786128" cy="441960"/>
           </a:xfrm>
           <a:prstGeom prst="rect">
@@ -21021,8 +21021,8 @@
         </p:nvSpPr>
         <p:spPr>
           <a:xfrm>
-            <a:off x="6435851" y="2186940"/>
-            <a:ext cx="1583944" cy="457200"/>
+            <a:off x="6479097" y="2186940"/>
+            <a:ext cx="1381716" cy="457200"/>
           </a:xfrm>
           <a:prstGeom prst="rect">
             <a:avLst/>
@@ -21031,7 +21031,7 @@
         </p:spPr>
         <p:txBody>
           <a:bodyPr wrap="none" lIns="45720" rIns="45720" tIns="18288" bIns="18288" anchor="ctr">
-            <a:spAutoFit/>
+            <a:noAutofit/>
           </a:bodyPr>
           <a:lstStyle/>
           <a:p>
@@ -21064,7 +21064,7 @@
         </p:blipFill>
         <p:spPr>
           <a:xfrm>
-            <a:off x="7882635" y="2194560"/>
+            <a:off x="7723653" y="2194560"/>
             <a:ext cx="2033015" cy="441960"/>
           </a:xfrm>
           <a:prstGeom prst="rect">
@@ -21080,8 +21080,8 @@
         </p:nvSpPr>
         <p:spPr>
           <a:xfrm>
-            <a:off x="9915651" y="2186940"/>
-            <a:ext cx="897128" cy="457200"/>
+            <a:off x="9756669" y="2186940"/>
+            <a:ext cx="813314" cy="457200"/>
           </a:xfrm>
           <a:prstGeom prst="rect">
             <a:avLst/>
@@ -21090,7 +21090,7 @@
         </p:spPr>
         <p:txBody>
           <a:bodyPr wrap="none" lIns="45720" rIns="45720" tIns="18288" bIns="18288" anchor="ctr">
-            <a:spAutoFit/>
+            <a:noAutofit/>
           </a:bodyPr>
           <a:lstStyle/>
           <a:p>

--- a/a7/build/out/u4/A7 4.04  Slides.pptx
+++ b/a7/build/out/u4/A7 4.04  Slides.pptx
@@ -4086,7 +4086,7 @@
                 </a:solidFill>
                 <a:latin typeface="Century Schoolbook"/>
               </a:rPr>
-              <a:t> square metres</a:t>
+              <a:t> square meters</a:t>
             </a:r>
           </a:p>
         </p:txBody>
@@ -7102,8 +7102,8 @@
         </p:nvSpPr>
         <p:spPr>
           <a:xfrm>
-            <a:off x="1448837" y="2171700"/>
-            <a:ext cx="4697470" cy="457200"/>
+            <a:off x="1234440" y="1851660"/>
+            <a:ext cx="4352401" cy="457200"/>
           </a:xfrm>
           <a:prstGeom prst="rect">
             <a:avLst/>
@@ -7118,7 +7118,7 @@
           <a:p>
             <a:pPr algn="l"/>
             <a:r>
-              <a:rPr sz="2600" b="0" i="0">
+              <a:rPr sz="2400" b="0" i="0">
                 <a:solidFill>
                   <a:srgbClr val="1A1A1A"/>
                 </a:solidFill>
@@ -7131,7 +7131,7 @@
       </p:sp>
       <p:pic>
         <p:nvPicPr>
-          <p:cNvPr id="10" name="Picture 9" descr="ba81893977cc2ed5.png"/>
+          <p:cNvPr id="10" name="Picture 9" descr="69f46df5ecb064d7.png"/>
           <p:cNvPicPr>
             <a:picLocks noChangeAspect="1"/>
           </p:cNvPicPr>
@@ -7145,8 +7145,8 @@
         </p:blipFill>
         <p:spPr>
           <a:xfrm>
-            <a:off x="6009147" y="2226564"/>
-            <a:ext cx="1392936" cy="347472"/>
+            <a:off x="5449681" y="1938527"/>
+            <a:ext cx="1127760" cy="283464"/>
           </a:xfrm>
           <a:prstGeom prst="rect">
             <a:avLst/>
@@ -7161,8 +7161,8 @@
         </p:nvSpPr>
         <p:spPr>
           <a:xfrm>
-            <a:off x="7402083" y="2171700"/>
-            <a:ext cx="1381716" cy="457200"/>
+            <a:off x="6577441" y="1851660"/>
+            <a:ext cx="1291636" cy="457200"/>
           </a:xfrm>
           <a:prstGeom prst="rect">
             <a:avLst/>
@@ -7177,7 +7177,7 @@
           <a:p>
             <a:pPr algn="l"/>
             <a:r>
-              <a:rPr sz="2600" b="0" i="0">
+              <a:rPr sz="2400" b="0" i="0">
                 <a:solidFill>
                   <a:srgbClr val="1A1A1A"/>
                 </a:solidFill>
@@ -7190,7 +7190,7 @@
       </p:sp>
       <p:pic>
         <p:nvPicPr>
-          <p:cNvPr id="12" name="Picture 11" descr="711dc73e4b84c61f.png"/>
+          <p:cNvPr id="12" name="Picture 11" descr="dd823fb368db84d4.png"/>
           <p:cNvPicPr>
             <a:picLocks noChangeAspect="1"/>
           </p:cNvPicPr>
@@ -7204,8 +7204,8 @@
         </p:blipFill>
         <p:spPr>
           <a:xfrm>
-            <a:off x="8646639" y="2225040"/>
-            <a:ext cx="1389888" cy="350520"/>
+            <a:off x="7731917" y="1937003"/>
+            <a:ext cx="1127760" cy="286512"/>
           </a:xfrm>
           <a:prstGeom prst="rect">
             <a:avLst/>
@@ -7220,8 +7220,8 @@
         </p:nvSpPr>
         <p:spPr>
           <a:xfrm>
-            <a:off x="10036527" y="2171700"/>
-            <a:ext cx="813314" cy="457200"/>
+            <a:off x="8859677" y="1851660"/>
+            <a:ext cx="766986" cy="457200"/>
           </a:xfrm>
           <a:prstGeom prst="rect">
             <a:avLst/>
@@ -7236,7 +7236,7 @@
           <a:p>
             <a:pPr algn="l"/>
             <a:r>
-              <a:rPr sz="2600" b="0" i="0">
+              <a:rPr sz="2400" b="0" i="0">
                 <a:solidFill>
                   <a:srgbClr val="1A1A1A"/>
                 </a:solidFill>
@@ -7255,29 +7255,29 @@
         </p:nvSpPr>
         <p:spPr>
           <a:xfrm>
-            <a:off x="777240" y="2880360"/>
-            <a:ext cx="10607040" cy="465151"/>
-          </a:xfrm>
-          <a:prstGeom prst="rect">
-            <a:avLst/>
-          </a:prstGeom>
-          <a:noFill/>
-        </p:spPr>
-        <p:txBody>
-          <a:bodyPr wrap="square" lIns="45720" rIns="45720" tIns="18288" bIns="18288" anchor="t">
-            <a:spAutoFit/>
-          </a:bodyPr>
-          <a:lstStyle/>
-          <a:p>
-            <a:pPr algn="ctr"/>
-            <a:r>
-              <a:rPr sz="2600" b="0" i="0">
+            <a:off x="1234440" y="2487168"/>
+            <a:ext cx="10058400" cy="429370"/>
+          </a:xfrm>
+          <a:prstGeom prst="rect">
+            <a:avLst/>
+          </a:prstGeom>
+          <a:noFill/>
+        </p:spPr>
+        <p:txBody>
+          <a:bodyPr wrap="square" lIns="45720" rIns="45720" tIns="18288" bIns="18288" anchor="t">
+            <a:spAutoFit/>
+          </a:bodyPr>
+          <a:lstStyle/>
+          <a:p>
+            <a:pPr algn="l"/>
+            <a:r>
+              <a:rPr sz="2400" b="0" i="0">
                 <a:solidFill>
                   <a:srgbClr val="1A1A1A"/>
                 </a:solidFill>
                 <a:latin typeface="Century Schoolbook"/>
               </a:rPr>
-              <a:t>The pond is 3 metres deep.</a:t>
+              <a:t>The pond is 3 meters deep.</a:t>
             </a:r>
           </a:p>
         </p:txBody>
@@ -7290,29 +7290,29 @@
         </p:nvSpPr>
         <p:spPr>
           <a:xfrm>
-            <a:off x="777240" y="3455239"/>
-            <a:ext cx="10607040" cy="411480"/>
-          </a:xfrm>
-          <a:prstGeom prst="rect">
-            <a:avLst/>
-          </a:prstGeom>
-          <a:noFill/>
-        </p:spPr>
-        <p:txBody>
-          <a:bodyPr wrap="square" lIns="45720" rIns="45720" tIns="18288" bIns="18288" anchor="t">
-            <a:spAutoFit/>
-          </a:bodyPr>
-          <a:lstStyle/>
-          <a:p>
-            <a:pPr algn="ctr"/>
-            <a:r>
-              <a:rPr sz="2300" b="0" i="0">
+            <a:off x="1234440" y="3026266"/>
+            <a:ext cx="10058400" cy="858740"/>
+          </a:xfrm>
+          <a:prstGeom prst="rect">
+            <a:avLst/>
+          </a:prstGeom>
+          <a:noFill/>
+        </p:spPr>
+        <p:txBody>
+          <a:bodyPr wrap="square" lIns="45720" rIns="45720" tIns="18288" bIns="18288" anchor="t">
+            <a:spAutoFit/>
+          </a:bodyPr>
+          <a:lstStyle/>
+          <a:p>
+            <a:pPr algn="l"/>
+            <a:r>
+              <a:rPr sz="2400" b="1" i="0">
                 <a:solidFill>
                   <a:srgbClr val="1A1A1A"/>
                 </a:solidFill>
                 <a:latin typeface="Century Schoolbook"/>
               </a:rPr>
-              <a:t>What is the surface area, to the right number of significant digits?</a:t>
+              <a:t>Find the surface area. Round to the correct number of significant digits.</a:t>
             </a:r>
           </a:p>
         </p:txBody>
@@ -7348,41 +7348,6 @@
                 <a:latin typeface="Century Schoolbook"/>
               </a:rPr>
               <a:t>Answer it.</a:t>
-            </a:r>
-          </a:p>
-        </p:txBody>
-      </p:sp>
-      <p:sp>
-        <p:nvSpPr>
-          <p:cNvPr id="17" name="TextBox 16"/>
-          <p:cNvSpPr txBox="1"/>
-          <p:nvPr/>
-        </p:nvSpPr>
-        <p:spPr>
-          <a:xfrm>
-            <a:off x="777240" y="4828032"/>
-            <a:ext cx="10607040" cy="365760"/>
-          </a:xfrm>
-          <a:prstGeom prst="rect">
-            <a:avLst/>
-          </a:prstGeom>
-          <a:noFill/>
-        </p:spPr>
-        <p:txBody>
-          <a:bodyPr wrap="square" lIns="45720" rIns="45720" tIns="18288" bIns="18288" anchor="t">
-            <a:spAutoFit/>
-          </a:bodyPr>
-          <a:lstStyle/>
-          <a:p>
-            <a:pPr algn="ctr"/>
-            <a:r>
-              <a:rPr sz="1900" b="0" i="1">
-                <a:solidFill>
-                  <a:srgbClr val="6B6B6B"/>
-                </a:solidFill>
-                <a:latin typeface="Century Schoolbook"/>
-              </a:rPr>
-              <a:t>Two digits each.</a:t>
             </a:r>
           </a:p>
         </p:txBody>
@@ -7658,8 +7623,8 @@
         </p:nvSpPr>
         <p:spPr>
           <a:xfrm>
-            <a:off x="1450361" y="2080260"/>
-            <a:ext cx="4697470" cy="457200"/>
+            <a:off x="1234440" y="1851660"/>
+            <a:ext cx="4352401" cy="457200"/>
           </a:xfrm>
           <a:prstGeom prst="rect">
             <a:avLst/>
@@ -7674,7 +7639,7 @@
           <a:p>
             <a:pPr algn="l"/>
             <a:r>
-              <a:rPr sz="2600" b="0" i="0">
+              <a:rPr sz="2400" b="0" i="0">
                 <a:solidFill>
                   <a:srgbClr val="1A1A1A"/>
                 </a:solidFill>
@@ -7687,7 +7652,7 @@
       </p:sp>
       <p:pic>
         <p:nvPicPr>
-          <p:cNvPr id="10" name="Picture 9" descr="ca87a5b7cdff0592.png"/>
+          <p:cNvPr id="10" name="Picture 9" descr="877de329d13d7ebe.png"/>
           <p:cNvPicPr>
             <a:picLocks noChangeAspect="1"/>
           </p:cNvPicPr>
@@ -7701,8 +7666,8 @@
         </p:blipFill>
         <p:spPr>
           <a:xfrm>
-            <a:off x="6010671" y="2135124"/>
-            <a:ext cx="1392936" cy="347472"/>
+            <a:off x="5449681" y="1938527"/>
+            <a:ext cx="1127760" cy="283464"/>
           </a:xfrm>
           <a:prstGeom prst="rect">
             <a:avLst/>
@@ -7717,8 +7682,8 @@
         </p:nvSpPr>
         <p:spPr>
           <a:xfrm>
-            <a:off x="7403607" y="2080260"/>
-            <a:ext cx="1381716" cy="457200"/>
+            <a:off x="6577441" y="1851660"/>
+            <a:ext cx="1291636" cy="457200"/>
           </a:xfrm>
           <a:prstGeom prst="rect">
             <a:avLst/>
@@ -7733,7 +7698,7 @@
           <a:p>
             <a:pPr algn="l"/>
             <a:r>
-              <a:rPr sz="2600" b="0" i="0">
+              <a:rPr sz="2400" b="0" i="0">
                 <a:solidFill>
                   <a:srgbClr val="1A1A1A"/>
                 </a:solidFill>
@@ -7746,7 +7711,7 @@
       </p:sp>
       <p:pic>
         <p:nvPicPr>
-          <p:cNvPr id="12" name="Picture 11" descr="39148797183f8f68.png"/>
+          <p:cNvPr id="12" name="Picture 11" descr="98384e6b1ba1215b.png"/>
           <p:cNvPicPr>
             <a:picLocks noChangeAspect="1"/>
           </p:cNvPicPr>
@@ -7760,8 +7725,8 @@
         </p:blipFill>
         <p:spPr>
           <a:xfrm>
-            <a:off x="8648163" y="2133599"/>
-            <a:ext cx="1386840" cy="350520"/>
+            <a:off x="7731917" y="1938527"/>
+            <a:ext cx="1130808" cy="283464"/>
           </a:xfrm>
           <a:prstGeom prst="rect">
             <a:avLst/>
@@ -7776,8 +7741,8 @@
         </p:nvSpPr>
         <p:spPr>
           <a:xfrm>
-            <a:off x="10035003" y="2080260"/>
-            <a:ext cx="813314" cy="457200"/>
+            <a:off x="8862725" y="1851660"/>
+            <a:ext cx="766986" cy="457200"/>
           </a:xfrm>
           <a:prstGeom prst="rect">
             <a:avLst/>
@@ -7792,7 +7757,7 @@
           <a:p>
             <a:pPr algn="l"/>
             <a:r>
-              <a:rPr sz="2600" b="0" i="0">
+              <a:rPr sz="2400" b="0" i="0">
                 <a:solidFill>
                   <a:srgbClr val="1A1A1A"/>
                 </a:solidFill>
@@ -7811,8 +7776,78 @@
         </p:nvSpPr>
         <p:spPr>
           <a:xfrm>
-            <a:off x="777240" y="2788920"/>
-            <a:ext cx="10607040" cy="465151"/>
+            <a:off x="1234440" y="2487168"/>
+            <a:ext cx="10058400" cy="429370"/>
+          </a:xfrm>
+          <a:prstGeom prst="rect">
+            <a:avLst/>
+          </a:prstGeom>
+          <a:noFill/>
+        </p:spPr>
+        <p:txBody>
+          <a:bodyPr wrap="square" lIns="45720" rIns="45720" tIns="18288" bIns="18288" anchor="t">
+            <a:spAutoFit/>
+          </a:bodyPr>
+          <a:lstStyle/>
+          <a:p>
+            <a:pPr algn="l"/>
+            <a:r>
+              <a:rPr sz="2400" b="0" i="0">
+                <a:solidFill>
+                  <a:srgbClr val="1A1A1A"/>
+                </a:solidFill>
+                <a:latin typeface="Century Schoolbook"/>
+              </a:rPr>
+              <a:t>The pond is 3 meters deep.</a:t>
+            </a:r>
+          </a:p>
+        </p:txBody>
+      </p:sp>
+      <p:sp>
+        <p:nvSpPr>
+          <p:cNvPr id="15" name="TextBox 14"/>
+          <p:cNvSpPr txBox="1"/>
+          <p:nvPr/>
+        </p:nvSpPr>
+        <p:spPr>
+          <a:xfrm>
+            <a:off x="1234440" y="3026266"/>
+            <a:ext cx="10058400" cy="858740"/>
+          </a:xfrm>
+          <a:prstGeom prst="rect">
+            <a:avLst/>
+          </a:prstGeom>
+          <a:noFill/>
+        </p:spPr>
+        <p:txBody>
+          <a:bodyPr wrap="square" lIns="45720" rIns="45720" tIns="18288" bIns="18288" anchor="t">
+            <a:spAutoFit/>
+          </a:bodyPr>
+          <a:lstStyle/>
+          <a:p>
+            <a:pPr algn="l"/>
+            <a:r>
+              <a:rPr sz="2400" b="1" i="0">
+                <a:solidFill>
+                  <a:srgbClr val="1A1A1A"/>
+                </a:solidFill>
+                <a:latin typeface="Century Schoolbook"/>
+              </a:rPr>
+              <a:t>Find the surface area. Round to the correct number of significant digits.</a:t>
+            </a:r>
+          </a:p>
+        </p:txBody>
+      </p:sp>
+      <p:sp>
+        <p:nvSpPr>
+          <p:cNvPr id="16" name="TextBox 15"/>
+          <p:cNvSpPr txBox="1"/>
+          <p:nvPr/>
+        </p:nvSpPr>
+        <p:spPr>
+          <a:xfrm>
+            <a:off x="1828800" y="4086175"/>
+            <a:ext cx="8503920" cy="548640"/>
           </a:xfrm>
           <a:prstGeom prst="rect">
             <a:avLst/>
@@ -7827,27 +7862,27 @@
           <a:p>
             <a:pPr algn="ctr"/>
             <a:r>
-              <a:rPr sz="2600" b="0" i="0">
-                <a:solidFill>
-                  <a:srgbClr val="1A1A1A"/>
-                </a:solidFill>
-                <a:latin typeface="Century Schoolbook"/>
-              </a:rPr>
-              <a:t>The pond is 3 metres deep.</a:t>
-            </a:r>
-          </a:p>
-        </p:txBody>
-      </p:sp>
-      <p:sp>
-        <p:nvSpPr>
-          <p:cNvPr id="15" name="TextBox 14"/>
-          <p:cNvSpPr txBox="1"/>
-          <p:nvPr/>
-        </p:nvSpPr>
-        <p:spPr>
-          <a:xfrm>
-            <a:off x="777240" y="3363799"/>
-            <a:ext cx="10607040" cy="411480"/>
+              <a:rPr sz="2400" b="0" i="0">
+                <a:solidFill>
+                  <a:srgbClr val="6B6B6B"/>
+                </a:solidFill>
+                <a:latin typeface="Century Schoolbook"/>
+              </a:rPr>
+              <a:t>11,900, kept to two digits</a:t>
+            </a:r>
+          </a:p>
+        </p:txBody>
+      </p:sp>
+      <p:sp>
+        <p:nvSpPr>
+          <p:cNvPr id="17" name="TextBox 16"/>
+          <p:cNvSpPr txBox="1"/>
+          <p:nvPr/>
+        </p:nvSpPr>
+        <p:spPr>
+          <a:xfrm>
+            <a:off x="777240" y="4817695"/>
+            <a:ext cx="10607040" cy="548640"/>
           </a:xfrm>
           <a:prstGeom prst="rect">
             <a:avLst/>
@@ -7862,76 +7897,6 @@
           <a:p>
             <a:pPr algn="ctr"/>
             <a:r>
-              <a:rPr sz="2300" b="0" i="0">
-                <a:solidFill>
-                  <a:srgbClr val="1A1A1A"/>
-                </a:solidFill>
-                <a:latin typeface="Century Schoolbook"/>
-              </a:rPr>
-              <a:t>What is the surface area, to the right number of significant digits?</a:t>
-            </a:r>
-          </a:p>
-        </p:txBody>
-      </p:sp>
-      <p:sp>
-        <p:nvSpPr>
-          <p:cNvPr id="16" name="TextBox 15"/>
-          <p:cNvSpPr txBox="1"/>
-          <p:nvPr/>
-        </p:nvSpPr>
-        <p:spPr>
-          <a:xfrm>
-            <a:off x="1828800" y="3930727"/>
-            <a:ext cx="8503920" cy="548640"/>
-          </a:xfrm>
-          <a:prstGeom prst="rect">
-            <a:avLst/>
-          </a:prstGeom>
-          <a:noFill/>
-        </p:spPr>
-        <p:txBody>
-          <a:bodyPr wrap="square" lIns="45720" rIns="45720" tIns="18288" bIns="18288" anchor="t">
-            <a:spAutoFit/>
-          </a:bodyPr>
-          <a:lstStyle/>
-          <a:p>
-            <a:pPr algn="ctr"/>
-            <a:r>
-              <a:rPr sz="2400" b="0" i="0">
-                <a:solidFill>
-                  <a:srgbClr val="6B6B6B"/>
-                </a:solidFill>
-                <a:latin typeface="Century Schoolbook"/>
-              </a:rPr>
-              <a:t>11,900, kept to two digits</a:t>
-            </a:r>
-          </a:p>
-        </p:txBody>
-      </p:sp>
-      <p:sp>
-        <p:nvSpPr>
-          <p:cNvPr id="17" name="TextBox 16"/>
-          <p:cNvSpPr txBox="1"/>
-          <p:nvPr/>
-        </p:nvSpPr>
-        <p:spPr>
-          <a:xfrm>
-            <a:off x="777240" y="4663440"/>
-            <a:ext cx="10607040" cy="548640"/>
-          </a:xfrm>
-          <a:prstGeom prst="rect">
-            <a:avLst/>
-          </a:prstGeom>
-          <a:noFill/>
-        </p:spPr>
-        <p:txBody>
-          <a:bodyPr wrap="square" lIns="45720" rIns="45720" tIns="18288" bIns="18288" anchor="t">
-            <a:spAutoFit/>
-          </a:bodyPr>
-          <a:lstStyle/>
-          <a:p>
-            <a:pPr algn="ctr"/>
-            <a:r>
               <a:rPr sz="3200" b="1" i="0">
                 <a:solidFill>
                   <a:srgbClr val="9E1B32"/>
@@ -7956,7 +7921,7 @@
                 </a:solidFill>
                 <a:latin typeface="Century Schoolbook"/>
               </a:rPr>
-              <a:t> square metres</a:t>
+              <a:t> square meters</a:t>
             </a:r>
           </a:p>
         </p:txBody>
@@ -9694,7 +9659,7 @@
         </p:blipFill>
         <p:spPr>
           <a:xfrm>
-            <a:off x="1990170" y="2194560"/>
+            <a:off x="1989302" y="2194560"/>
             <a:ext cx="4020312" cy="411480"/>
           </a:xfrm>
           <a:prstGeom prst="rect">
@@ -9710,8 +9675,8 @@
         </p:nvSpPr>
         <p:spPr>
           <a:xfrm>
-            <a:off x="6010482" y="2171700"/>
-            <a:ext cx="4298027" cy="457200"/>
+            <a:off x="6009614" y="2171700"/>
+            <a:ext cx="4299762" cy="457200"/>
           </a:xfrm>
           <a:prstGeom prst="rect">
             <a:avLst/>
@@ -9732,7 +9697,7 @@
                 </a:solidFill>
                 <a:latin typeface="Century Schoolbook"/>
               </a:rPr>
-              <a:t>   metres, both measured.</a:t>
+              <a:t>   meters, both measured.</a:t>
             </a:r>
           </a:p>
         </p:txBody>
@@ -10121,7 +10086,7 @@
         </p:blipFill>
         <p:spPr>
           <a:xfrm>
-            <a:off x="1988646" y="2104643"/>
+            <a:off x="1987778" y="2104643"/>
             <a:ext cx="4023360" cy="408432"/>
           </a:xfrm>
           <a:prstGeom prst="rect">
@@ -10137,8 +10102,8 @@
         </p:nvSpPr>
         <p:spPr>
           <a:xfrm>
-            <a:off x="6012006" y="2080260"/>
-            <a:ext cx="4298027" cy="457200"/>
+            <a:off x="6011138" y="2080260"/>
+            <a:ext cx="4299762" cy="457200"/>
           </a:xfrm>
           <a:prstGeom prst="rect">
             <a:avLst/>
@@ -10159,7 +10124,7 @@
                 </a:solidFill>
                 <a:latin typeface="Century Schoolbook"/>
               </a:rPr>
-              <a:t>   metres, both measured.</a:t>
+              <a:t>   meters, both measured.</a:t>
             </a:r>
           </a:p>
         </p:txBody>
@@ -20686,7 +20651,7 @@
                 </a:solidFill>
                 <a:latin typeface="Century Schoolbook"/>
               </a:rPr>
-              <a:t> square metres</a:t>
+              <a:t> square meters</a:t>
             </a:r>
           </a:p>
         </p:txBody>

--- a/a7/build/out/u4/A7 4.04  Slides.pptx
+++ b/a7/build/out/u4/A7 4.04  Slides.pptx
@@ -3442,7 +3442,7 @@
                 </a:solidFill>
                 <a:latin typeface="Century Schoolbook"/>
               </a:rPr>
-              <a:t>Today the numbers are measurements — and a measurement only knows so much.</a:t>
+              <a:t>Today the numbers are measurements, each with limits.</a:t>
             </a:r>
           </a:p>
         </p:txBody>
